--- a/paper-figures/retina-figs.pptx
+++ b/paper-figures/retina-figs.pptx
@@ -5,12 +5,13 @@
     <p:sldMasterId id="2147483684" r:id="rId1"/>
   </p:sldMasterIdLst>
   <p:notesMasterIdLst>
-    <p:notesMasterId r:id="rId5"/>
+    <p:notesMasterId r:id="rId6"/>
   </p:notesMasterIdLst>
   <p:sldIdLst>
     <p:sldId id="256" r:id="rId2"/>
     <p:sldId id="257" r:id="rId3"/>
-    <p:sldId id="259" r:id="rId4"/>
+    <p:sldId id="260" r:id="rId4"/>
+    <p:sldId id="259" r:id="rId5"/>
   </p:sldIdLst>
   <p:sldSz cx="16002000" cy="6858000"/>
   <p:notesSz cx="6858000" cy="9144000"/>
@@ -199,7 +200,7 @@
           <a:p>
             <a:fld id="{3FC871C0-221A-49E8-B430-16ED9E6AC47C}" type="datetimeFigureOut">
               <a:rPr lang="en-US" smtClean="0"/>
-              <a:t>12/13/2025</a:t>
+              <a:t>2/25/2026</a:t>
             </a:fld>
             <a:endParaRPr lang="en-US"/>
           </a:p>
@@ -499,6 +500,13 @@
             <a:ext cx="7200900" cy="3086100"/>
           </a:xfrm>
         </p:spPr>
+        <p:txBody>
+          <a:bodyPr/>
+          <a:lstStyle/>
+          <a:p>
+            <a:endParaRPr lang="en-GB"/>
+          </a:p>
+        </p:txBody>
       </p:sp>
       <p:sp>
         <p:nvSpPr>
@@ -600,6 +608,13 @@
             <a:ext cx="7200900" cy="3086100"/>
           </a:xfrm>
         </p:spPr>
+        <p:txBody>
+          <a:bodyPr/>
+          <a:lstStyle/>
+          <a:p>
+            <a:endParaRPr lang="en-GB"/>
+          </a:p>
+        </p:txBody>
       </p:sp>
       <p:sp>
         <p:nvSpPr>
@@ -676,7 +691,7 @@
         <p:cNvPr id="1" name="">
           <a:extLst>
             <a:ext uri="{FF2B5EF4-FFF2-40B4-BE49-F238E27FC236}">
-              <a16:creationId xmlns:a16="http://schemas.microsoft.com/office/drawing/2014/main" id="{68F69920-DABD-CACC-4FCC-ACF035EA080A}"/>
+              <a16:creationId xmlns:a16="http://schemas.microsoft.com/office/drawing/2014/main" id="{7C25CCBE-37A2-8FB5-9B54-E1AC260AB151}"/>
             </a:ext>
           </a:extLst>
         </p:cNvPr>
@@ -696,7 +711,7 @@
           <p:cNvPr id="2" name="Slide Image Placeholder 1">
             <a:extLst>
               <a:ext uri="{FF2B5EF4-FFF2-40B4-BE49-F238E27FC236}">
-                <a16:creationId xmlns:a16="http://schemas.microsoft.com/office/drawing/2014/main" id="{AAFCCE6C-7D1B-95A7-1D7D-F461C6A6B240}"/>
+                <a16:creationId xmlns:a16="http://schemas.microsoft.com/office/drawing/2014/main" id="{30AF0741-AFEC-E243-C3BB-0C41C0A29873}"/>
               </a:ext>
             </a:extLst>
           </p:cNvPr>
@@ -713,13 +728,20 @@
             <a:ext cx="7200900" cy="3086100"/>
           </a:xfrm>
         </p:spPr>
+        <p:txBody>
+          <a:bodyPr/>
+          <a:lstStyle/>
+          <a:p>
+            <a:endParaRPr lang="en-GB"/>
+          </a:p>
+        </p:txBody>
       </p:sp>
       <p:sp>
         <p:nvSpPr>
           <p:cNvPr id="3" name="Notes Placeholder 2">
             <a:extLst>
               <a:ext uri="{FF2B5EF4-FFF2-40B4-BE49-F238E27FC236}">
-                <a16:creationId xmlns:a16="http://schemas.microsoft.com/office/drawing/2014/main" id="{924944A5-9D19-9186-9F1D-CA761F31F36D}"/>
+                <a16:creationId xmlns:a16="http://schemas.microsoft.com/office/drawing/2014/main" id="{56F2E1E8-55C5-A3AF-8BF8-B37EFF7F896D}"/>
               </a:ext>
             </a:extLst>
           </p:cNvPr>
@@ -744,7 +766,7 @@
           <p:cNvPr id="4" name="Slide Number Placeholder 3">
             <a:extLst>
               <a:ext uri="{FF2B5EF4-FFF2-40B4-BE49-F238E27FC236}">
-                <a16:creationId xmlns:a16="http://schemas.microsoft.com/office/drawing/2014/main" id="{2650230E-246B-4EAF-EC7B-C7AE9EB19C5D}"/>
+                <a16:creationId xmlns:a16="http://schemas.microsoft.com/office/drawing/2014/main" id="{C9BB083D-23FC-02C0-984B-387A588F84AC}"/>
               </a:ext>
             </a:extLst>
           </p:cNvPr>
@@ -763,6 +785,126 @@
             <a:fld id="{BD2CD2D4-8657-4323-87EC-E08703E72665}" type="slidenum">
               <a:rPr lang="en-US" smtClean="0"/>
               <a:t>3</a:t>
+            </a:fld>
+            <a:endParaRPr lang="en-US"/>
+          </a:p>
+        </p:txBody>
+      </p:sp>
+    </p:spTree>
+    <p:extLst>
+      <p:ext uri="{BB962C8B-B14F-4D97-AF65-F5344CB8AC3E}">
+        <p14:creationId xmlns:p14="http://schemas.microsoft.com/office/powerpoint/2010/main" val="652179941"/>
+      </p:ext>
+    </p:extLst>
+  </p:cSld>
+  <p:clrMapOvr>
+    <a:masterClrMapping/>
+  </p:clrMapOvr>
+</p:notes>
+</file>
+
+<file path=ppt/notesSlides/notesSlide4.xml><?xml version="1.0" encoding="utf-8"?>
+<p:notes xmlns:a="http://schemas.openxmlformats.org/drawingml/2006/main" xmlns:r="http://schemas.openxmlformats.org/officeDocument/2006/relationships" xmlns:p="http://schemas.openxmlformats.org/presentationml/2006/main">
+  <p:cSld>
+    <p:spTree>
+      <p:nvGrpSpPr>
+        <p:cNvPr id="1" name="">
+          <a:extLst>
+            <a:ext uri="{FF2B5EF4-FFF2-40B4-BE49-F238E27FC236}">
+              <a16:creationId xmlns:a16="http://schemas.microsoft.com/office/drawing/2014/main" id="{68F69920-DABD-CACC-4FCC-ACF035EA080A}"/>
+            </a:ext>
+          </a:extLst>
+        </p:cNvPr>
+        <p:cNvGrpSpPr/>
+        <p:nvPr/>
+      </p:nvGrpSpPr>
+      <p:grpSpPr>
+        <a:xfrm>
+          <a:off x="0" y="0"/>
+          <a:ext cx="0" cy="0"/>
+          <a:chOff x="0" y="0"/>
+          <a:chExt cx="0" cy="0"/>
+        </a:xfrm>
+      </p:grpSpPr>
+      <p:sp>
+        <p:nvSpPr>
+          <p:cNvPr id="2" name="Slide Image Placeholder 1">
+            <a:extLst>
+              <a:ext uri="{FF2B5EF4-FFF2-40B4-BE49-F238E27FC236}">
+                <a16:creationId xmlns:a16="http://schemas.microsoft.com/office/drawing/2014/main" id="{AAFCCE6C-7D1B-95A7-1D7D-F461C6A6B240}"/>
+              </a:ext>
+            </a:extLst>
+          </p:cNvPr>
+          <p:cNvSpPr>
+            <a:spLocks noGrp="1" noRot="1" noChangeAspect="1"/>
+          </p:cNvSpPr>
+          <p:nvPr>
+            <p:ph type="sldImg"/>
+          </p:nvPr>
+        </p:nvSpPr>
+        <p:spPr>
+          <a:xfrm>
+            <a:off x="-171450" y="1143000"/>
+            <a:ext cx="7200900" cy="3086100"/>
+          </a:xfrm>
+        </p:spPr>
+        <p:txBody>
+          <a:bodyPr/>
+          <a:lstStyle/>
+          <a:p>
+            <a:endParaRPr lang="en-GB"/>
+          </a:p>
+        </p:txBody>
+      </p:sp>
+      <p:sp>
+        <p:nvSpPr>
+          <p:cNvPr id="3" name="Notes Placeholder 2">
+            <a:extLst>
+              <a:ext uri="{FF2B5EF4-FFF2-40B4-BE49-F238E27FC236}">
+                <a16:creationId xmlns:a16="http://schemas.microsoft.com/office/drawing/2014/main" id="{924944A5-9D19-9186-9F1D-CA761F31F36D}"/>
+              </a:ext>
+            </a:extLst>
+          </p:cNvPr>
+          <p:cNvSpPr>
+            <a:spLocks noGrp="1"/>
+          </p:cNvSpPr>
+          <p:nvPr>
+            <p:ph type="body" idx="1"/>
+          </p:nvPr>
+        </p:nvSpPr>
+        <p:spPr/>
+        <p:txBody>
+          <a:bodyPr/>
+          <a:lstStyle/>
+          <a:p>
+            <a:endParaRPr lang="en-US" dirty="0"/>
+          </a:p>
+        </p:txBody>
+      </p:sp>
+      <p:sp>
+        <p:nvSpPr>
+          <p:cNvPr id="4" name="Slide Number Placeholder 3">
+            <a:extLst>
+              <a:ext uri="{FF2B5EF4-FFF2-40B4-BE49-F238E27FC236}">
+                <a16:creationId xmlns:a16="http://schemas.microsoft.com/office/drawing/2014/main" id="{2650230E-246B-4EAF-EC7B-C7AE9EB19C5D}"/>
+              </a:ext>
+            </a:extLst>
+          </p:cNvPr>
+          <p:cNvSpPr>
+            <a:spLocks noGrp="1"/>
+          </p:cNvSpPr>
+          <p:nvPr>
+            <p:ph type="sldNum" sz="quarter" idx="5"/>
+          </p:nvPr>
+        </p:nvSpPr>
+        <p:spPr/>
+        <p:txBody>
+          <a:bodyPr/>
+          <a:lstStyle/>
+          <a:p>
+            <a:fld id="{BD2CD2D4-8657-4323-87EC-E08703E72665}" type="slidenum">
+              <a:rPr lang="en-US" smtClean="0"/>
+              <a:t>4</a:t>
             </a:fld>
             <a:endParaRPr lang="en-US"/>
           </a:p>
@@ -912,7 +1054,7 @@
           <a:p>
             <a:fld id="{7E2FD2A9-3325-4BA5-BA70-B62EDFFF97DF}" type="datetimeFigureOut">
               <a:rPr lang="en-US" smtClean="0"/>
-              <a:t>12/13/2025</a:t>
+              <a:t>2/25/2026</a:t>
             </a:fld>
             <a:endParaRPr lang="en-US"/>
           </a:p>
@@ -1082,7 +1224,7 @@
           <a:p>
             <a:fld id="{7E2FD2A9-3325-4BA5-BA70-B62EDFFF97DF}" type="datetimeFigureOut">
               <a:rPr lang="en-US" smtClean="0"/>
-              <a:t>12/13/2025</a:t>
+              <a:t>2/25/2026</a:t>
             </a:fld>
             <a:endParaRPr lang="en-US"/>
           </a:p>
@@ -1262,7 +1404,7 @@
           <a:p>
             <a:fld id="{7E2FD2A9-3325-4BA5-BA70-B62EDFFF97DF}" type="datetimeFigureOut">
               <a:rPr lang="en-US" smtClean="0"/>
-              <a:t>12/13/2025</a:t>
+              <a:t>2/25/2026</a:t>
             </a:fld>
             <a:endParaRPr lang="en-US"/>
           </a:p>
@@ -1432,7 +1574,7 @@
           <a:p>
             <a:fld id="{7E2FD2A9-3325-4BA5-BA70-B62EDFFF97DF}" type="datetimeFigureOut">
               <a:rPr lang="en-US" smtClean="0"/>
-              <a:t>12/13/2025</a:t>
+              <a:t>2/25/2026</a:t>
             </a:fld>
             <a:endParaRPr lang="en-US"/>
           </a:p>
@@ -1678,7 +1820,7 @@
           <a:p>
             <a:fld id="{7E2FD2A9-3325-4BA5-BA70-B62EDFFF97DF}" type="datetimeFigureOut">
               <a:rPr lang="en-US" smtClean="0"/>
-              <a:t>12/13/2025</a:t>
+              <a:t>2/25/2026</a:t>
             </a:fld>
             <a:endParaRPr lang="en-US"/>
           </a:p>
@@ -1910,7 +2052,7 @@
           <a:p>
             <a:fld id="{7E2FD2A9-3325-4BA5-BA70-B62EDFFF97DF}" type="datetimeFigureOut">
               <a:rPr lang="en-US" smtClean="0"/>
-              <a:t>12/13/2025</a:t>
+              <a:t>2/25/2026</a:t>
             </a:fld>
             <a:endParaRPr lang="en-US"/>
           </a:p>
@@ -2277,7 +2419,7 @@
           <a:p>
             <a:fld id="{7E2FD2A9-3325-4BA5-BA70-B62EDFFF97DF}" type="datetimeFigureOut">
               <a:rPr lang="en-US" smtClean="0"/>
-              <a:t>12/13/2025</a:t>
+              <a:t>2/25/2026</a:t>
             </a:fld>
             <a:endParaRPr lang="en-US"/>
           </a:p>
@@ -2395,7 +2537,7 @@
           <a:p>
             <a:fld id="{7E2FD2A9-3325-4BA5-BA70-B62EDFFF97DF}" type="datetimeFigureOut">
               <a:rPr lang="en-US" smtClean="0"/>
-              <a:t>12/13/2025</a:t>
+              <a:t>2/25/2026</a:t>
             </a:fld>
             <a:endParaRPr lang="en-US"/>
           </a:p>
@@ -2490,7 +2632,7 @@
           <a:p>
             <a:fld id="{7E2FD2A9-3325-4BA5-BA70-B62EDFFF97DF}" type="datetimeFigureOut">
               <a:rPr lang="en-US" smtClean="0"/>
-              <a:t>12/13/2025</a:t>
+              <a:t>2/25/2026</a:t>
             </a:fld>
             <a:endParaRPr lang="en-US"/>
           </a:p>
@@ -2767,7 +2909,7 @@
           <a:p>
             <a:fld id="{7E2FD2A9-3325-4BA5-BA70-B62EDFFF97DF}" type="datetimeFigureOut">
               <a:rPr lang="en-US" smtClean="0"/>
-              <a:t>12/13/2025</a:t>
+              <a:t>2/25/2026</a:t>
             </a:fld>
             <a:endParaRPr lang="en-US"/>
           </a:p>
@@ -3024,7 +3166,7 @@
           <a:p>
             <a:fld id="{7E2FD2A9-3325-4BA5-BA70-B62EDFFF97DF}" type="datetimeFigureOut">
               <a:rPr lang="en-US" smtClean="0"/>
-              <a:t>12/13/2025</a:t>
+              <a:t>2/25/2026</a:t>
             </a:fld>
             <a:endParaRPr lang="en-US"/>
           </a:p>
@@ -3237,7 +3379,7 @@
           <a:p>
             <a:fld id="{7E2FD2A9-3325-4BA5-BA70-B62EDFFF97DF}" type="datetimeFigureOut">
               <a:rPr lang="en-US" smtClean="0"/>
-              <a:t>12/13/2025</a:t>
+              <a:t>2/25/2026</a:t>
             </a:fld>
             <a:endParaRPr lang="en-US"/>
           </a:p>
@@ -9120,8 +9262,8 @@
           </a:ln>
         </p:spPr>
       </p:pic>
-      <mc:AlternateContent xmlns:mc="http://schemas.openxmlformats.org/markup-compatibility/2006">
-        <mc:Choice xmlns:a14="http://schemas.microsoft.com/office/drawing/2010/main" Requires="a14">
+      <mc:AlternateContent xmlns:mc="http://schemas.openxmlformats.org/markup-compatibility/2006" xmlns:a14="http://schemas.microsoft.com/office/drawing/2010/main">
+        <mc:Choice Requires="a14">
           <p:sp>
             <p:nvSpPr>
               <p:cNvPr id="29" name="TextBox 28">
@@ -9190,7 +9332,7 @@
             </p:txBody>
           </p:sp>
         </mc:Choice>
-        <mc:Fallback>
+        <mc:Fallback xmlns="">
           <p:sp>
             <p:nvSpPr>
               <p:cNvPr id="29" name="TextBox 28">
@@ -9271,8 +9413,8 @@
           </a:prstGeom>
         </p:spPr>
       </p:pic>
-      <mc:AlternateContent xmlns:mc="http://schemas.openxmlformats.org/markup-compatibility/2006">
-        <mc:Choice xmlns:a14="http://schemas.microsoft.com/office/drawing/2010/main" Requires="a14">
+      <mc:AlternateContent xmlns:mc="http://schemas.openxmlformats.org/markup-compatibility/2006" xmlns:a14="http://schemas.microsoft.com/office/drawing/2010/main">
+        <mc:Choice Requires="a14">
           <p:sp>
             <p:nvSpPr>
               <p:cNvPr id="33" name="TextBox 32">
@@ -9341,7 +9483,7 @@
             </p:txBody>
           </p:sp>
         </mc:Choice>
-        <mc:Fallback>
+        <mc:Fallback xmlns="">
           <p:sp>
             <p:nvSpPr>
               <p:cNvPr id="33" name="TextBox 32">
@@ -9600,8 +9742,8 @@
           </a:fontRef>
         </p:style>
       </p:cxnSp>
-      <mc:AlternateContent xmlns:mc="http://schemas.openxmlformats.org/markup-compatibility/2006">
-        <mc:Choice xmlns:a14="http://schemas.microsoft.com/office/drawing/2010/main" Requires="a14">
+      <mc:AlternateContent xmlns:mc="http://schemas.openxmlformats.org/markup-compatibility/2006" xmlns:a14="http://schemas.microsoft.com/office/drawing/2010/main">
+        <mc:Choice Requires="a14">
           <p:sp>
             <p:nvSpPr>
               <p:cNvPr id="46" name="TextBox 45">
@@ -9678,7 +9820,7 @@
             </p:txBody>
           </p:sp>
         </mc:Choice>
-        <mc:Fallback>
+        <mc:Fallback xmlns="">
           <p:sp>
             <p:nvSpPr>
               <p:cNvPr id="46" name="TextBox 45">
@@ -9723,8 +9865,8 @@
           </p:sp>
         </mc:Fallback>
       </mc:AlternateContent>
-      <mc:AlternateContent xmlns:mc="http://schemas.openxmlformats.org/markup-compatibility/2006">
-        <mc:Choice xmlns:a14="http://schemas.microsoft.com/office/drawing/2010/main" Requires="a14">
+      <mc:AlternateContent xmlns:mc="http://schemas.openxmlformats.org/markup-compatibility/2006" xmlns:a14="http://schemas.microsoft.com/office/drawing/2010/main">
+        <mc:Choice Requires="a14">
           <p:sp>
             <p:nvSpPr>
               <p:cNvPr id="47" name="TextBox 46">
@@ -9801,7 +9943,7 @@
             </p:txBody>
           </p:sp>
         </mc:Choice>
-        <mc:Fallback>
+        <mc:Fallback xmlns="">
           <p:sp>
             <p:nvSpPr>
               <p:cNvPr id="47" name="TextBox 46">
@@ -10887,6 +11029,2670 @@
         <p:cNvPr id="1" name="">
           <a:extLst>
             <a:ext uri="{FF2B5EF4-FFF2-40B4-BE49-F238E27FC236}">
+              <a16:creationId xmlns:a16="http://schemas.microsoft.com/office/drawing/2014/main" id="{6F0FA62E-4E4A-AE3B-8B12-057B0E488655}"/>
+            </a:ext>
+          </a:extLst>
+        </p:cNvPr>
+        <p:cNvGrpSpPr/>
+        <p:nvPr/>
+      </p:nvGrpSpPr>
+      <p:grpSpPr>
+        <a:xfrm>
+          <a:off x="0" y="0"/>
+          <a:ext cx="0" cy="0"/>
+          <a:chOff x="0" y="0"/>
+          <a:chExt cx="0" cy="0"/>
+        </a:xfrm>
+      </p:grpSpPr>
+      <p:sp>
+        <p:nvSpPr>
+          <p:cNvPr id="12" name="TextBox 11">
+            <a:extLst>
+              <a:ext uri="{FF2B5EF4-FFF2-40B4-BE49-F238E27FC236}">
+                <a16:creationId xmlns:a16="http://schemas.microsoft.com/office/drawing/2014/main" id="{D6FC950A-77ED-06EA-21D6-E93123CBEACA}"/>
+              </a:ext>
+            </a:extLst>
+          </p:cNvPr>
+          <p:cNvSpPr txBox="1"/>
+          <p:nvPr/>
+        </p:nvSpPr>
+        <p:spPr>
+          <a:xfrm>
+            <a:off x="8798448" y="478474"/>
+            <a:ext cx="401072" cy="386709"/>
+          </a:xfrm>
+          <a:prstGeom prst="rect">
+            <a:avLst/>
+          </a:prstGeom>
+          <a:noFill/>
+        </p:spPr>
+        <p:txBody>
+          <a:bodyPr wrap="none" rtlCol="0">
+            <a:spAutoFit/>
+          </a:bodyPr>
+          <a:lstStyle/>
+          <a:p>
+            <a:r>
+              <a:rPr lang="en-US" sz="1913" b="1" dirty="0"/>
+              <a:t>b)</a:t>
+            </a:r>
+          </a:p>
+        </p:txBody>
+      </p:sp>
+      <p:sp>
+        <p:nvSpPr>
+          <p:cNvPr id="9" name="Rectangle: Rounded Corners 8">
+            <a:extLst>
+              <a:ext uri="{FF2B5EF4-FFF2-40B4-BE49-F238E27FC236}">
+                <a16:creationId xmlns:a16="http://schemas.microsoft.com/office/drawing/2014/main" id="{66C70D4B-5B8C-0958-43B2-C64FE10F2085}"/>
+              </a:ext>
+            </a:extLst>
+          </p:cNvPr>
+          <p:cNvSpPr/>
+          <p:nvPr/>
+        </p:nvSpPr>
+        <p:spPr>
+          <a:xfrm>
+            <a:off x="10823024" y="820616"/>
+            <a:ext cx="1838875" cy="3584669"/>
+          </a:xfrm>
+          <a:prstGeom prst="roundRect">
+            <a:avLst/>
+          </a:prstGeom>
+          <a:noFill/>
+          <a:ln w="38100">
+            <a:prstDash val="sysDot"/>
+          </a:ln>
+        </p:spPr>
+        <p:style>
+          <a:lnRef idx="2">
+            <a:schemeClr val="accent1">
+              <a:shade val="15000"/>
+            </a:schemeClr>
+          </a:lnRef>
+          <a:fillRef idx="1">
+            <a:schemeClr val="accent1"/>
+          </a:fillRef>
+          <a:effectRef idx="0">
+            <a:schemeClr val="accent1"/>
+          </a:effectRef>
+          <a:fontRef idx="minor">
+            <a:schemeClr val="lt1"/>
+          </a:fontRef>
+        </p:style>
+        <p:txBody>
+          <a:bodyPr rtlCol="0" anchor="ctr"/>
+          <a:lstStyle/>
+          <a:p>
+            <a:pPr algn="ctr"/>
+            <a:endParaRPr lang="en-GB"/>
+          </a:p>
+        </p:txBody>
+      </p:sp>
+      <p:sp>
+        <p:nvSpPr>
+          <p:cNvPr id="45" name="Rectangle: Rounded Corners 44">
+            <a:extLst>
+              <a:ext uri="{FF2B5EF4-FFF2-40B4-BE49-F238E27FC236}">
+                <a16:creationId xmlns:a16="http://schemas.microsoft.com/office/drawing/2014/main" id="{3A58852B-E4EE-6DE8-6C89-6B4994F864C2}"/>
+              </a:ext>
+            </a:extLst>
+          </p:cNvPr>
+          <p:cNvSpPr/>
+          <p:nvPr/>
+        </p:nvSpPr>
+        <p:spPr>
+          <a:xfrm>
+            <a:off x="9027484" y="4792885"/>
+            <a:ext cx="3387122" cy="1391177"/>
+          </a:xfrm>
+          <a:prstGeom prst="roundRect">
+            <a:avLst/>
+          </a:prstGeom>
+          <a:noFill/>
+          <a:ln w="38100">
+            <a:solidFill>
+              <a:schemeClr val="tx1"/>
+            </a:solidFill>
+          </a:ln>
+          <a:effectLst>
+            <a:outerShdw blurRad="50800" dist="38100" dir="2700000" algn="tl" rotWithShape="0">
+              <a:prstClr val="black">
+                <a:alpha val="40000"/>
+              </a:prstClr>
+            </a:outerShdw>
+          </a:effectLst>
+        </p:spPr>
+        <p:style>
+          <a:lnRef idx="2">
+            <a:schemeClr val="accent1">
+              <a:shade val="15000"/>
+            </a:schemeClr>
+          </a:lnRef>
+          <a:fillRef idx="1">
+            <a:schemeClr val="accent1"/>
+          </a:fillRef>
+          <a:effectRef idx="0">
+            <a:schemeClr val="accent1"/>
+          </a:effectRef>
+          <a:fontRef idx="minor">
+            <a:schemeClr val="lt1"/>
+          </a:fontRef>
+        </p:style>
+        <p:txBody>
+          <a:bodyPr rtlCol="0" anchor="ctr"/>
+          <a:lstStyle/>
+          <a:p>
+            <a:pPr algn="ctr"/>
+            <a:endParaRPr lang="en-GB" sz="1350"/>
+          </a:p>
+        </p:txBody>
+      </p:sp>
+      <p:pic>
+        <p:nvPicPr>
+          <p:cNvPr id="107" name="Picture 5">
+            <a:extLst>
+              <a:ext uri="{FF2B5EF4-FFF2-40B4-BE49-F238E27FC236}">
+                <a16:creationId xmlns:a16="http://schemas.microsoft.com/office/drawing/2014/main" id="{45489448-0D13-1862-5276-583BFE689871}"/>
+              </a:ext>
+            </a:extLst>
+          </p:cNvPr>
+          <p:cNvPicPr>
+            <a:picLocks noChangeAspect="1" noChangeArrowheads="1"/>
+          </p:cNvPicPr>
+          <p:nvPr/>
+        </p:nvPicPr>
+        <p:blipFill>
+          <a:blip r:embed="rId3">
+            <a:extLst>
+              <a:ext uri="{28A0092B-C50C-407E-A947-70E740481C1C}">
+                <a14:useLocalDpi xmlns:a14="http://schemas.microsoft.com/office/drawing/2010/main" val="0"/>
+              </a:ext>
+            </a:extLst>
+          </a:blip>
+          <a:srcRect/>
+          <a:stretch>
+            <a:fillRect/>
+          </a:stretch>
+        </p:blipFill>
+        <p:spPr bwMode="auto">
+          <a:xfrm>
+            <a:off x="9591982" y="4844544"/>
+            <a:ext cx="1308746" cy="1269689"/>
+          </a:xfrm>
+          <a:prstGeom prst="rect">
+            <a:avLst/>
+          </a:prstGeom>
+          <a:noFill/>
+          <a:extLst>
+            <a:ext uri="{909E8E84-426E-40DD-AFC4-6F175D3DCCD1}">
+              <a14:hiddenFill xmlns:a14="http://schemas.microsoft.com/office/drawing/2010/main">
+                <a:solidFill>
+                  <a:srgbClr val="BBE0E3"/>
+                </a:solidFill>
+              </a14:hiddenFill>
+            </a:ext>
+          </a:extLst>
+        </p:spPr>
+      </p:pic>
+      <p:sp>
+        <p:nvSpPr>
+          <p:cNvPr id="128" name="Rectangle: Rounded Corners 127">
+            <a:extLst>
+              <a:ext uri="{FF2B5EF4-FFF2-40B4-BE49-F238E27FC236}">
+                <a16:creationId xmlns:a16="http://schemas.microsoft.com/office/drawing/2014/main" id="{E3322064-F434-DF51-C508-15549A8E8E5A}"/>
+              </a:ext>
+            </a:extLst>
+          </p:cNvPr>
+          <p:cNvSpPr/>
+          <p:nvPr/>
+        </p:nvSpPr>
+        <p:spPr>
+          <a:xfrm>
+            <a:off x="9681247" y="4929473"/>
+            <a:ext cx="1185767" cy="1161103"/>
+          </a:xfrm>
+          <a:prstGeom prst="roundRect">
+            <a:avLst/>
+          </a:prstGeom>
+          <a:noFill/>
+          <a:ln w="28575">
+            <a:solidFill>
+              <a:srgbClr val="FF0000"/>
+            </a:solidFill>
+            <a:prstDash val="dash"/>
+          </a:ln>
+        </p:spPr>
+        <p:style>
+          <a:lnRef idx="2">
+            <a:schemeClr val="accent1">
+              <a:shade val="15000"/>
+            </a:schemeClr>
+          </a:lnRef>
+          <a:fillRef idx="1">
+            <a:schemeClr val="accent1"/>
+          </a:fillRef>
+          <a:effectRef idx="0">
+            <a:schemeClr val="accent1"/>
+          </a:effectRef>
+          <a:fontRef idx="minor">
+            <a:schemeClr val="lt1"/>
+          </a:fontRef>
+        </p:style>
+        <p:txBody>
+          <a:bodyPr rtlCol="0" anchor="ctr"/>
+          <a:lstStyle/>
+          <a:p>
+            <a:pPr algn="ctr"/>
+            <a:endParaRPr lang="en-US" sz="1435"/>
+          </a:p>
+        </p:txBody>
+      </p:sp>
+      <p:pic>
+        <p:nvPicPr>
+          <p:cNvPr id="3" name="Picture 2" descr="A person with his hand up&#10;&#10;AI-generated content may be incorrect.">
+            <a:extLst>
+              <a:ext uri="{FF2B5EF4-FFF2-40B4-BE49-F238E27FC236}">
+                <a16:creationId xmlns:a16="http://schemas.microsoft.com/office/drawing/2014/main" id="{6CA721A7-E662-3F56-9AED-35FD939925B3}"/>
+              </a:ext>
+            </a:extLst>
+          </p:cNvPr>
+          <p:cNvPicPr>
+            <a:picLocks noChangeAspect="1"/>
+          </p:cNvPicPr>
+          <p:nvPr/>
+        </p:nvPicPr>
+        <p:blipFill>
+          <a:blip r:embed="rId4">
+            <a:extLst>
+              <a:ext uri="{28A0092B-C50C-407E-A947-70E740481C1C}">
+                <a14:useLocalDpi xmlns:a14="http://schemas.microsoft.com/office/drawing/2010/main" val="0"/>
+              </a:ext>
+            </a:extLst>
+          </a:blip>
+          <a:stretch>
+            <a:fillRect/>
+          </a:stretch>
+        </p:blipFill>
+        <p:spPr>
+          <a:xfrm>
+            <a:off x="3205133" y="662147"/>
+            <a:ext cx="1877370" cy="1777788"/>
+          </a:xfrm>
+          <a:prstGeom prst="rect">
+            <a:avLst/>
+          </a:prstGeom>
+        </p:spPr>
+      </p:pic>
+      <p:sp>
+        <p:nvSpPr>
+          <p:cNvPr id="4" name="Rectangle: Rounded Corners 3">
+            <a:extLst>
+              <a:ext uri="{FF2B5EF4-FFF2-40B4-BE49-F238E27FC236}">
+                <a16:creationId xmlns:a16="http://schemas.microsoft.com/office/drawing/2014/main" id="{74A022FE-F86C-B3F7-CD92-7847A4F9810D}"/>
+              </a:ext>
+            </a:extLst>
+          </p:cNvPr>
+          <p:cNvSpPr/>
+          <p:nvPr/>
+        </p:nvSpPr>
+        <p:spPr>
+          <a:xfrm>
+            <a:off x="5924961" y="991733"/>
+            <a:ext cx="1533873" cy="1134063"/>
+          </a:xfrm>
+          <a:prstGeom prst="roundRect">
+            <a:avLst/>
+          </a:prstGeom>
+          <a:ln w="28575"/>
+          <a:effectLst>
+            <a:outerShdw blurRad="50800" dist="38100" dir="2700000" algn="tl" rotWithShape="0">
+              <a:prstClr val="black">
+                <a:alpha val="40000"/>
+              </a:prstClr>
+            </a:outerShdw>
+          </a:effectLst>
+        </p:spPr>
+        <p:style>
+          <a:lnRef idx="1">
+            <a:schemeClr val="dk1"/>
+          </a:lnRef>
+          <a:fillRef idx="2">
+            <a:schemeClr val="dk1"/>
+          </a:fillRef>
+          <a:effectRef idx="1">
+            <a:schemeClr val="dk1"/>
+          </a:effectRef>
+          <a:fontRef idx="minor">
+            <a:schemeClr val="dk1"/>
+          </a:fontRef>
+        </p:style>
+        <p:txBody>
+          <a:bodyPr rtlCol="0" anchor="ctr"/>
+          <a:lstStyle/>
+          <a:p>
+            <a:pPr algn="ctr"/>
+            <a:endParaRPr lang="en-US" sz="1435" dirty="0"/>
+          </a:p>
+        </p:txBody>
+      </p:sp>
+      <p:cxnSp>
+        <p:nvCxnSpPr>
+          <p:cNvPr id="8" name="Straight Connector 7">
+            <a:extLst>
+              <a:ext uri="{FF2B5EF4-FFF2-40B4-BE49-F238E27FC236}">
+                <a16:creationId xmlns:a16="http://schemas.microsoft.com/office/drawing/2014/main" id="{74F040F7-EB9B-0C45-37AC-C550C2E68D16}"/>
+              </a:ext>
+            </a:extLst>
+          </p:cNvPr>
+          <p:cNvCxnSpPr>
+            <a:cxnSpLocks/>
+          </p:cNvCxnSpPr>
+          <p:nvPr/>
+        </p:nvCxnSpPr>
+        <p:spPr>
+          <a:xfrm flipH="1" flipV="1">
+            <a:off x="5076529" y="662147"/>
+            <a:ext cx="887407" cy="412991"/>
+          </a:xfrm>
+          <a:prstGeom prst="line">
+            <a:avLst/>
+          </a:prstGeom>
+          <a:ln w="57150">
+            <a:solidFill>
+              <a:schemeClr val="tx1"/>
+            </a:solidFill>
+          </a:ln>
+        </p:spPr>
+        <p:style>
+          <a:lnRef idx="2">
+            <a:schemeClr val="accent1"/>
+          </a:lnRef>
+          <a:fillRef idx="0">
+            <a:schemeClr val="accent1"/>
+          </a:fillRef>
+          <a:effectRef idx="1">
+            <a:schemeClr val="accent1"/>
+          </a:effectRef>
+          <a:fontRef idx="minor">
+            <a:schemeClr val="tx1"/>
+          </a:fontRef>
+        </p:style>
+      </p:cxnSp>
+      <p:cxnSp>
+        <p:nvCxnSpPr>
+          <p:cNvPr id="10" name="Straight Connector 9">
+            <a:extLst>
+              <a:ext uri="{FF2B5EF4-FFF2-40B4-BE49-F238E27FC236}">
+                <a16:creationId xmlns:a16="http://schemas.microsoft.com/office/drawing/2014/main" id="{9493A4CF-EE1B-9DC1-CD20-49317F730079}"/>
+              </a:ext>
+            </a:extLst>
+          </p:cNvPr>
+          <p:cNvCxnSpPr>
+            <a:cxnSpLocks/>
+          </p:cNvCxnSpPr>
+          <p:nvPr/>
+        </p:nvCxnSpPr>
+        <p:spPr>
+          <a:xfrm flipH="1">
+            <a:off x="5082504" y="2042388"/>
+            <a:ext cx="881432" cy="384061"/>
+          </a:xfrm>
+          <a:prstGeom prst="line">
+            <a:avLst/>
+          </a:prstGeom>
+          <a:ln w="57150">
+            <a:solidFill>
+              <a:schemeClr val="tx1"/>
+            </a:solidFill>
+          </a:ln>
+        </p:spPr>
+        <p:style>
+          <a:lnRef idx="2">
+            <a:schemeClr val="accent1"/>
+          </a:lnRef>
+          <a:fillRef idx="0">
+            <a:schemeClr val="accent1"/>
+          </a:fillRef>
+          <a:effectRef idx="1">
+            <a:schemeClr val="accent1"/>
+          </a:effectRef>
+          <a:fontRef idx="minor">
+            <a:schemeClr val="tx1"/>
+          </a:fontRef>
+        </p:style>
+      </p:cxnSp>
+      <p:sp>
+        <p:nvSpPr>
+          <p:cNvPr id="15" name="Arrow: Right 14">
+            <a:extLst>
+              <a:ext uri="{FF2B5EF4-FFF2-40B4-BE49-F238E27FC236}">
+                <a16:creationId xmlns:a16="http://schemas.microsoft.com/office/drawing/2014/main" id="{8265DED7-C7AC-2474-208F-40FD6D98A37F}"/>
+              </a:ext>
+            </a:extLst>
+          </p:cNvPr>
+          <p:cNvSpPr/>
+          <p:nvPr/>
+        </p:nvSpPr>
+        <p:spPr>
+          <a:xfrm>
+            <a:off x="7458834" y="1358812"/>
+            <a:ext cx="1580082" cy="399907"/>
+          </a:xfrm>
+          <a:prstGeom prst="rightArrow">
+            <a:avLst>
+              <a:gd name="adj1" fmla="val 50000"/>
+              <a:gd name="adj2" fmla="val 80597"/>
+            </a:avLst>
+          </a:prstGeom>
+          <a:ln w="28575"/>
+          <a:effectLst>
+            <a:outerShdw blurRad="50800" dist="38100" dir="2700000" algn="tl" rotWithShape="0">
+              <a:prstClr val="black">
+                <a:alpha val="40000"/>
+              </a:prstClr>
+            </a:outerShdw>
+          </a:effectLst>
+        </p:spPr>
+        <p:style>
+          <a:lnRef idx="1">
+            <a:schemeClr val="dk1"/>
+          </a:lnRef>
+          <a:fillRef idx="2">
+            <a:schemeClr val="dk1"/>
+          </a:fillRef>
+          <a:effectRef idx="1">
+            <a:schemeClr val="dk1"/>
+          </a:effectRef>
+          <a:fontRef idx="minor">
+            <a:schemeClr val="dk1"/>
+          </a:fontRef>
+        </p:style>
+        <p:txBody>
+          <a:bodyPr rtlCol="0" anchor="ctr"/>
+          <a:lstStyle/>
+          <a:p>
+            <a:pPr algn="ctr"/>
+            <a:endParaRPr lang="en-US" sz="1435"/>
+          </a:p>
+        </p:txBody>
+      </p:sp>
+      <p:sp>
+        <p:nvSpPr>
+          <p:cNvPr id="16" name="TextBox 15">
+            <a:extLst>
+              <a:ext uri="{FF2B5EF4-FFF2-40B4-BE49-F238E27FC236}">
+                <a16:creationId xmlns:a16="http://schemas.microsoft.com/office/drawing/2014/main" id="{046F7F9A-2193-58E4-CD61-E47660AB569D}"/>
+              </a:ext>
+            </a:extLst>
+          </p:cNvPr>
+          <p:cNvSpPr txBox="1"/>
+          <p:nvPr/>
+        </p:nvSpPr>
+        <p:spPr>
+          <a:xfrm>
+            <a:off x="7829288" y="1614890"/>
+            <a:ext cx="743409" cy="369332"/>
+          </a:xfrm>
+          <a:prstGeom prst="rect">
+            <a:avLst/>
+          </a:prstGeom>
+          <a:noFill/>
+        </p:spPr>
+        <p:txBody>
+          <a:bodyPr wrap="none" rtlCol="0">
+            <a:spAutoFit/>
+          </a:bodyPr>
+          <a:lstStyle/>
+          <a:p>
+            <a:r>
+              <a:rPr lang="en-US" dirty="0"/>
+              <a:t>x,y,p,t</a:t>
+            </a:r>
+          </a:p>
+        </p:txBody>
+      </p:sp>
+      <p:pic>
+        <p:nvPicPr>
+          <p:cNvPr id="18" name="Picture 17" descr="A drawing of a person's hand&#10;&#10;AI-generated content may be incorrect.">
+            <a:extLst>
+              <a:ext uri="{FF2B5EF4-FFF2-40B4-BE49-F238E27FC236}">
+                <a16:creationId xmlns:a16="http://schemas.microsoft.com/office/drawing/2014/main" id="{AB549DE0-A715-E56B-694E-D64ED4BEFB88}"/>
+              </a:ext>
+            </a:extLst>
+          </p:cNvPr>
+          <p:cNvPicPr>
+            <a:picLocks noChangeAspect="1"/>
+          </p:cNvPicPr>
+          <p:nvPr/>
+        </p:nvPicPr>
+        <p:blipFill>
+          <a:blip r:embed="rId5">
+            <a:extLst>
+              <a:ext uri="{28A0092B-C50C-407E-A947-70E740481C1C}">
+                <a14:useLocalDpi xmlns:a14="http://schemas.microsoft.com/office/drawing/2010/main" val="0"/>
+              </a:ext>
+            </a:extLst>
+          </a:blip>
+          <a:stretch>
+            <a:fillRect/>
+          </a:stretch>
+        </p:blipFill>
+        <p:spPr>
+          <a:xfrm>
+            <a:off x="9038916" y="825059"/>
+            <a:ext cx="1538955" cy="1457325"/>
+          </a:xfrm>
+          <a:prstGeom prst="rect">
+            <a:avLst/>
+          </a:prstGeom>
+          <a:ln>
+            <a:solidFill>
+              <a:schemeClr val="tx1"/>
+            </a:solidFill>
+          </a:ln>
+        </p:spPr>
+      </p:pic>
+      <p:sp>
+        <p:nvSpPr>
+          <p:cNvPr id="19" name="TextBox 18">
+            <a:extLst>
+              <a:ext uri="{FF2B5EF4-FFF2-40B4-BE49-F238E27FC236}">
+                <a16:creationId xmlns:a16="http://schemas.microsoft.com/office/drawing/2014/main" id="{2DE7DB31-85C3-DDE2-FD81-1CD0C6412CAA}"/>
+              </a:ext>
+            </a:extLst>
+          </p:cNvPr>
+          <p:cNvSpPr txBox="1"/>
+          <p:nvPr/>
+        </p:nvSpPr>
+        <p:spPr>
+          <a:xfrm>
+            <a:off x="3108152" y="252680"/>
+            <a:ext cx="391454" cy="386709"/>
+          </a:xfrm>
+          <a:prstGeom prst="rect">
+            <a:avLst/>
+          </a:prstGeom>
+          <a:noFill/>
+        </p:spPr>
+        <p:txBody>
+          <a:bodyPr wrap="none" rtlCol="0">
+            <a:spAutoFit/>
+          </a:bodyPr>
+          <a:lstStyle/>
+          <a:p>
+            <a:r>
+              <a:rPr lang="en-US" sz="1913" b="1" dirty="0"/>
+              <a:t>a)</a:t>
+            </a:r>
+          </a:p>
+        </p:txBody>
+      </p:sp>
+      <p:sp>
+        <p:nvSpPr>
+          <p:cNvPr id="26" name="TextBox 25">
+            <a:extLst>
+              <a:ext uri="{FF2B5EF4-FFF2-40B4-BE49-F238E27FC236}">
+                <a16:creationId xmlns:a16="http://schemas.microsoft.com/office/drawing/2014/main" id="{9A65E91B-B261-017C-0E45-FF701CD2E05E}"/>
+              </a:ext>
+            </a:extLst>
+          </p:cNvPr>
+          <p:cNvSpPr txBox="1"/>
+          <p:nvPr/>
+        </p:nvSpPr>
+        <p:spPr>
+          <a:xfrm>
+            <a:off x="6072234" y="635950"/>
+            <a:ext cx="1239326" cy="369332"/>
+          </a:xfrm>
+          <a:prstGeom prst="rect">
+            <a:avLst/>
+          </a:prstGeom>
+          <a:noFill/>
+        </p:spPr>
+        <p:txBody>
+          <a:bodyPr wrap="square">
+            <a:spAutoFit/>
+          </a:bodyPr>
+          <a:lstStyle/>
+          <a:p>
+            <a:pPr algn="ctr"/>
+            <a:r>
+              <a:rPr lang="en-US" b="1" dirty="0"/>
+              <a:t>DVS</a:t>
+            </a:r>
+          </a:p>
+        </p:txBody>
+      </p:sp>
+      <p:sp>
+        <p:nvSpPr>
+          <p:cNvPr id="25" name="TextBox 24">
+            <a:extLst>
+              <a:ext uri="{FF2B5EF4-FFF2-40B4-BE49-F238E27FC236}">
+                <a16:creationId xmlns:a16="http://schemas.microsoft.com/office/drawing/2014/main" id="{8DDA7FB8-70D1-BCC1-7BF6-DB9B235EE802}"/>
+              </a:ext>
+            </a:extLst>
+          </p:cNvPr>
+          <p:cNvSpPr txBox="1"/>
+          <p:nvPr/>
+        </p:nvSpPr>
+        <p:spPr>
+          <a:xfrm>
+            <a:off x="5808040" y="2250514"/>
+            <a:ext cx="3115628" cy="369332"/>
+          </a:xfrm>
+          <a:prstGeom prst="rect">
+            <a:avLst/>
+          </a:prstGeom>
+          <a:noFill/>
+        </p:spPr>
+        <p:txBody>
+          <a:bodyPr wrap="square">
+            <a:spAutoFit/>
+          </a:bodyPr>
+          <a:lstStyle/>
+          <a:p>
+            <a:pPr algn="ctr"/>
+            <a:r>
+              <a:rPr lang="en-US" b="1" dirty="0"/>
+              <a:t>Silicon Retina</a:t>
+            </a:r>
+          </a:p>
+        </p:txBody>
+      </p:sp>
+      <p:sp>
+        <p:nvSpPr>
+          <p:cNvPr id="21" name="Rectangle: Rounded Corners 20">
+            <a:extLst>
+              <a:ext uri="{FF2B5EF4-FFF2-40B4-BE49-F238E27FC236}">
+                <a16:creationId xmlns:a16="http://schemas.microsoft.com/office/drawing/2014/main" id="{9127EA8B-F187-8926-834E-79D2B2225DB6}"/>
+              </a:ext>
+            </a:extLst>
+          </p:cNvPr>
+          <p:cNvSpPr/>
+          <p:nvPr/>
+        </p:nvSpPr>
+        <p:spPr>
+          <a:xfrm>
+            <a:off x="5924961" y="2565100"/>
+            <a:ext cx="2881786" cy="2122091"/>
+          </a:xfrm>
+          <a:prstGeom prst="roundRect">
+            <a:avLst/>
+          </a:prstGeom>
+          <a:solidFill>
+            <a:srgbClr val="92D050">
+              <a:alpha val="45098"/>
+            </a:srgbClr>
+          </a:solidFill>
+          <a:ln w="28575"/>
+          <a:effectLst>
+            <a:outerShdw blurRad="50800" dist="38100" dir="2700000" algn="tl" rotWithShape="0">
+              <a:prstClr val="black">
+                <a:alpha val="40000"/>
+              </a:prstClr>
+            </a:outerShdw>
+          </a:effectLst>
+        </p:spPr>
+        <p:style>
+          <a:lnRef idx="2">
+            <a:schemeClr val="dk1"/>
+          </a:lnRef>
+          <a:fillRef idx="1">
+            <a:schemeClr val="lt1"/>
+          </a:fillRef>
+          <a:effectRef idx="0">
+            <a:schemeClr val="dk1"/>
+          </a:effectRef>
+          <a:fontRef idx="minor">
+            <a:schemeClr val="dk1"/>
+          </a:fontRef>
+        </p:style>
+        <p:txBody>
+          <a:bodyPr rtlCol="0" anchor="ctr"/>
+          <a:lstStyle/>
+          <a:p>
+            <a:pPr algn="ctr"/>
+            <a:endParaRPr lang="en-US" sz="1435" dirty="0"/>
+          </a:p>
+        </p:txBody>
+      </p:sp>
+      <p:pic>
+        <p:nvPicPr>
+          <p:cNvPr id="28" name="Picture 27" descr="A person with their hands on their face&#10;&#10;AI-generated content may be incorrect.">
+            <a:extLst>
+              <a:ext uri="{FF2B5EF4-FFF2-40B4-BE49-F238E27FC236}">
+                <a16:creationId xmlns:a16="http://schemas.microsoft.com/office/drawing/2014/main" id="{0DCF09EE-37B0-665D-4F48-BD3480B57C00}"/>
+              </a:ext>
+            </a:extLst>
+          </p:cNvPr>
+          <p:cNvPicPr>
+            <a:picLocks noChangeAspect="1"/>
+          </p:cNvPicPr>
+          <p:nvPr/>
+        </p:nvPicPr>
+        <p:blipFill>
+          <a:blip r:embed="rId6">
+            <a:extLst>
+              <a:ext uri="{28A0092B-C50C-407E-A947-70E740481C1C}">
+                <a14:useLocalDpi xmlns:a14="http://schemas.microsoft.com/office/drawing/2010/main" val="0"/>
+              </a:ext>
+            </a:extLst>
+          </a:blip>
+          <a:stretch>
+            <a:fillRect/>
+          </a:stretch>
+        </p:blipFill>
+        <p:spPr>
+          <a:xfrm>
+            <a:off x="6004600" y="3204814"/>
+            <a:ext cx="846773" cy="801857"/>
+          </a:xfrm>
+          <a:prstGeom prst="rect">
+            <a:avLst/>
+          </a:prstGeom>
+          <a:ln>
+            <a:solidFill>
+              <a:schemeClr val="tx1"/>
+            </a:solidFill>
+          </a:ln>
+        </p:spPr>
+      </p:pic>
+      <mc:AlternateContent xmlns:mc="http://schemas.openxmlformats.org/markup-compatibility/2006">
+        <mc:Choice xmlns:a14="http://schemas.microsoft.com/office/drawing/2010/main" Requires="a14">
+          <p:sp>
+            <p:nvSpPr>
+              <p:cNvPr id="29" name="TextBox 28">
+                <a:extLst>
+                  <a:ext uri="{FF2B5EF4-FFF2-40B4-BE49-F238E27FC236}">
+                    <a16:creationId xmlns:a16="http://schemas.microsoft.com/office/drawing/2014/main" id="{2A7EA539-378E-3CE1-E890-7DF18C511F30}"/>
+                  </a:ext>
+                </a:extLst>
+              </p:cNvPr>
+              <p:cNvSpPr txBox="1"/>
+              <p:nvPr/>
+            </p:nvSpPr>
+            <p:spPr>
+              <a:xfrm>
+                <a:off x="6200032" y="2910262"/>
+                <a:ext cx="544188" cy="313163"/>
+              </a:xfrm>
+              <a:prstGeom prst="rect">
+                <a:avLst/>
+              </a:prstGeom>
+              <a:noFill/>
+            </p:spPr>
+            <p:txBody>
+              <a:bodyPr wrap="none" rtlCol="0">
+                <a:spAutoFit/>
+              </a:bodyPr>
+              <a:lstStyle/>
+              <a:p>
+                <a:pPr/>
+                <a14:m>
+                  <m:oMathPara xmlns:m="http://schemas.openxmlformats.org/officeDocument/2006/math">
+                    <m:oMathParaPr>
+                      <m:jc m:val="centerGroup"/>
+                    </m:oMathParaPr>
+                    <m:oMath xmlns:m="http://schemas.openxmlformats.org/officeDocument/2006/math">
+                      <m:sSub>
+                        <m:sSubPr>
+                          <m:ctrlPr>
+                            <a:rPr lang="en-US" sz="1435" i="1">
+                              <a:latin typeface="Cambria Math" panose="02040503050406030204" pitchFamily="18" charset="0"/>
+                            </a:rPr>
+                          </m:ctrlPr>
+                        </m:sSubPr>
+                        <m:e>
+                          <m:r>
+                            <a:rPr lang="en-US" sz="1435" i="1">
+                              <a:latin typeface="Cambria Math" panose="02040503050406030204" pitchFamily="18" charset="0"/>
+                            </a:rPr>
+                            <m:t>𝐼</m:t>
+                          </m:r>
+                        </m:e>
+                        <m:sub>
+                          <m:r>
+                            <a:rPr lang="en-US" sz="1435" i="1">
+                              <a:latin typeface="Cambria Math" panose="02040503050406030204" pitchFamily="18" charset="0"/>
+                            </a:rPr>
+                            <m:t>𝑂𝑃𝐿</m:t>
+                          </m:r>
+                        </m:sub>
+                      </m:sSub>
+                    </m:oMath>
+                  </m:oMathPara>
+                </a14:m>
+                <a:endParaRPr lang="en-US" sz="1435" dirty="0"/>
+              </a:p>
+            </p:txBody>
+          </p:sp>
+        </mc:Choice>
+        <mc:Fallback>
+          <p:sp>
+            <p:nvSpPr>
+              <p:cNvPr id="29" name="TextBox 28">
+                <a:extLst>
+                  <a:ext uri="{FF2B5EF4-FFF2-40B4-BE49-F238E27FC236}">
+                    <a16:creationId xmlns:a16="http://schemas.microsoft.com/office/drawing/2014/main" id="{2A7EA539-378E-3CE1-E890-7DF18C511F30}"/>
+                  </a:ext>
+                </a:extLst>
+              </p:cNvPr>
+              <p:cNvSpPr txBox="1">
+                <a:spLocks noRot="1" noChangeAspect="1" noMove="1" noResize="1" noEditPoints="1" noAdjustHandles="1" noChangeArrowheads="1" noChangeShapeType="1" noTextEdit="1"/>
+              </p:cNvSpPr>
+              <p:nvPr/>
+            </p:nvSpPr>
+            <p:spPr>
+              <a:xfrm>
+                <a:off x="6200032" y="2910262"/>
+                <a:ext cx="544188" cy="313163"/>
+              </a:xfrm>
+              <a:prstGeom prst="rect">
+                <a:avLst/>
+              </a:prstGeom>
+              <a:blipFill>
+                <a:blip r:embed="rId7"/>
+                <a:stretch>
+                  <a:fillRect/>
+                </a:stretch>
+              </a:blipFill>
+            </p:spPr>
+            <p:txBody>
+              <a:bodyPr/>
+              <a:lstStyle/>
+              <a:p>
+                <a:r>
+                  <a:rPr lang="en-GB">
+                    <a:noFill/>
+                  </a:rPr>
+                  <a:t> </a:t>
+                </a:r>
+              </a:p>
+            </p:txBody>
+          </p:sp>
+        </mc:Fallback>
+      </mc:AlternateContent>
+      <p:pic>
+        <p:nvPicPr>
+          <p:cNvPr id="31" name="Picture 30" descr="A person taking a selfie&#10;&#10;AI-generated content may be incorrect.">
+            <a:extLst>
+              <a:ext uri="{FF2B5EF4-FFF2-40B4-BE49-F238E27FC236}">
+                <a16:creationId xmlns:a16="http://schemas.microsoft.com/office/drawing/2014/main" id="{DE5AB86D-D0D4-32A1-04F9-1F07891265E7}"/>
+              </a:ext>
+            </a:extLst>
+          </p:cNvPr>
+          <p:cNvPicPr>
+            <a:picLocks noChangeAspect="1"/>
+          </p:cNvPicPr>
+          <p:nvPr/>
+        </p:nvPicPr>
+        <p:blipFill>
+          <a:blip r:embed="rId8">
+            <a:extLst>
+              <a:ext uri="{28A0092B-C50C-407E-A947-70E740481C1C}">
+                <a14:useLocalDpi xmlns:a14="http://schemas.microsoft.com/office/drawing/2010/main" val="0"/>
+              </a:ext>
+            </a:extLst>
+          </a:blip>
+          <a:stretch>
+            <a:fillRect/>
+          </a:stretch>
+        </p:blipFill>
+        <p:spPr>
+          <a:xfrm>
+            <a:off x="6956866" y="3207468"/>
+            <a:ext cx="846774" cy="801858"/>
+          </a:xfrm>
+          <a:prstGeom prst="rect">
+            <a:avLst/>
+          </a:prstGeom>
+        </p:spPr>
+      </p:pic>
+      <mc:AlternateContent xmlns:mc="http://schemas.openxmlformats.org/markup-compatibility/2006">
+        <mc:Choice xmlns:a14="http://schemas.microsoft.com/office/drawing/2010/main" Requires="a14">
+          <p:sp>
+            <p:nvSpPr>
+              <p:cNvPr id="33" name="TextBox 32">
+                <a:extLst>
+                  <a:ext uri="{FF2B5EF4-FFF2-40B4-BE49-F238E27FC236}">
+                    <a16:creationId xmlns:a16="http://schemas.microsoft.com/office/drawing/2014/main" id="{0AA16E79-C2A4-EC73-E8B9-CB798290E3FA}"/>
+                  </a:ext>
+                </a:extLst>
+              </p:cNvPr>
+              <p:cNvSpPr txBox="1"/>
+              <p:nvPr/>
+            </p:nvSpPr>
+            <p:spPr>
+              <a:xfrm>
+                <a:off x="7042462" y="2885119"/>
+                <a:ext cx="554126" cy="313163"/>
+              </a:xfrm>
+              <a:prstGeom prst="rect">
+                <a:avLst/>
+              </a:prstGeom>
+              <a:noFill/>
+            </p:spPr>
+            <p:txBody>
+              <a:bodyPr wrap="none" rtlCol="0">
+                <a:spAutoFit/>
+              </a:bodyPr>
+              <a:lstStyle/>
+              <a:p>
+                <a:pPr/>
+                <a14:m>
+                  <m:oMathPara xmlns:m="http://schemas.openxmlformats.org/officeDocument/2006/math">
+                    <m:oMathParaPr>
+                      <m:jc m:val="centerGroup"/>
+                    </m:oMathParaPr>
+                    <m:oMath xmlns:m="http://schemas.openxmlformats.org/officeDocument/2006/math">
+                      <m:sSub>
+                        <m:sSubPr>
+                          <m:ctrlPr>
+                            <a:rPr lang="en-US" sz="1435" i="1">
+                              <a:latin typeface="Cambria Math" panose="02040503050406030204" pitchFamily="18" charset="0"/>
+                            </a:rPr>
+                          </m:ctrlPr>
+                        </m:sSubPr>
+                        <m:e>
+                          <m:r>
+                            <a:rPr lang="en-US" sz="1435" i="1">
+                              <a:latin typeface="Cambria Math" panose="02040503050406030204" pitchFamily="18" charset="0"/>
+                            </a:rPr>
+                            <m:t>𝑉</m:t>
+                          </m:r>
+                        </m:e>
+                        <m:sub>
+                          <m:r>
+                            <a:rPr lang="en-US" sz="1435" i="1">
+                              <a:latin typeface="Cambria Math" panose="02040503050406030204" pitchFamily="18" charset="0"/>
+                            </a:rPr>
+                            <m:t>𝐵𝐼𝑃</m:t>
+                          </m:r>
+                        </m:sub>
+                      </m:sSub>
+                    </m:oMath>
+                  </m:oMathPara>
+                </a14:m>
+                <a:endParaRPr lang="en-US" sz="1435" dirty="0"/>
+              </a:p>
+            </p:txBody>
+          </p:sp>
+        </mc:Choice>
+        <mc:Fallback>
+          <p:sp>
+            <p:nvSpPr>
+              <p:cNvPr id="33" name="TextBox 32">
+                <a:extLst>
+                  <a:ext uri="{FF2B5EF4-FFF2-40B4-BE49-F238E27FC236}">
+                    <a16:creationId xmlns:a16="http://schemas.microsoft.com/office/drawing/2014/main" id="{0AA16E79-C2A4-EC73-E8B9-CB798290E3FA}"/>
+                  </a:ext>
+                </a:extLst>
+              </p:cNvPr>
+              <p:cNvSpPr txBox="1">
+                <a:spLocks noRot="1" noChangeAspect="1" noMove="1" noResize="1" noEditPoints="1" noAdjustHandles="1" noChangeArrowheads="1" noChangeShapeType="1" noTextEdit="1"/>
+              </p:cNvSpPr>
+              <p:nvPr/>
+            </p:nvSpPr>
+            <p:spPr>
+              <a:xfrm>
+                <a:off x="7042462" y="2885119"/>
+                <a:ext cx="554126" cy="313163"/>
+              </a:xfrm>
+              <a:prstGeom prst="rect">
+                <a:avLst/>
+              </a:prstGeom>
+              <a:blipFill>
+                <a:blip r:embed="rId9"/>
+                <a:stretch>
+                  <a:fillRect/>
+                </a:stretch>
+              </a:blipFill>
+            </p:spPr>
+            <p:txBody>
+              <a:bodyPr/>
+              <a:lstStyle/>
+              <a:p>
+                <a:r>
+                  <a:rPr lang="en-GB">
+                    <a:noFill/>
+                  </a:rPr>
+                  <a:t> </a:t>
+                </a:r>
+              </a:p>
+            </p:txBody>
+          </p:sp>
+        </mc:Fallback>
+      </mc:AlternateContent>
+      <p:pic>
+        <p:nvPicPr>
+          <p:cNvPr id="35" name="Picture 34" descr="A person with glasses and a hand gesture&#10;&#10;AI-generated content may be incorrect.">
+            <a:extLst>
+              <a:ext uri="{FF2B5EF4-FFF2-40B4-BE49-F238E27FC236}">
+                <a16:creationId xmlns:a16="http://schemas.microsoft.com/office/drawing/2014/main" id="{ECE7E735-0F7B-BF97-A61A-23609A79E30A}"/>
+              </a:ext>
+            </a:extLst>
+          </p:cNvPr>
+          <p:cNvPicPr>
+            <a:picLocks noChangeAspect="1"/>
+          </p:cNvPicPr>
+          <p:nvPr/>
+        </p:nvPicPr>
+        <p:blipFill>
+          <a:blip r:embed="rId10">
+            <a:extLst>
+              <a:ext uri="{28A0092B-C50C-407E-A947-70E740481C1C}">
+                <a14:useLocalDpi xmlns:a14="http://schemas.microsoft.com/office/drawing/2010/main" val="0"/>
+              </a:ext>
+            </a:extLst>
+          </a:blip>
+          <a:stretch>
+            <a:fillRect/>
+          </a:stretch>
+        </p:blipFill>
+        <p:spPr>
+          <a:xfrm>
+            <a:off x="7958367" y="2761318"/>
+            <a:ext cx="758735" cy="718489"/>
+          </a:xfrm>
+          <a:prstGeom prst="rect">
+            <a:avLst/>
+          </a:prstGeom>
+        </p:spPr>
+      </p:pic>
+      <p:pic>
+        <p:nvPicPr>
+          <p:cNvPr id="37" name="Picture 36" descr="A person in glasses and a mask&#10;&#10;AI-generated content may be incorrect.">
+            <a:extLst>
+              <a:ext uri="{FF2B5EF4-FFF2-40B4-BE49-F238E27FC236}">
+                <a16:creationId xmlns:a16="http://schemas.microsoft.com/office/drawing/2014/main" id="{AD1B8299-A40F-9642-68FD-D1FE468FBA9E}"/>
+              </a:ext>
+            </a:extLst>
+          </p:cNvPr>
+          <p:cNvPicPr>
+            <a:picLocks noChangeAspect="1"/>
+          </p:cNvPicPr>
+          <p:nvPr/>
+        </p:nvPicPr>
+        <p:blipFill>
+          <a:blip r:embed="rId11">
+            <a:extLst>
+              <a:ext uri="{28A0092B-C50C-407E-A947-70E740481C1C}">
+                <a14:useLocalDpi xmlns:a14="http://schemas.microsoft.com/office/drawing/2010/main" val="0"/>
+              </a:ext>
+            </a:extLst>
+          </a:blip>
+          <a:stretch>
+            <a:fillRect/>
+          </a:stretch>
+        </p:blipFill>
+        <p:spPr>
+          <a:xfrm>
+            <a:off x="7957931" y="3794602"/>
+            <a:ext cx="758735" cy="718490"/>
+          </a:xfrm>
+          <a:prstGeom prst="rect">
+            <a:avLst/>
+          </a:prstGeom>
+        </p:spPr>
+      </p:pic>
+      <p:cxnSp>
+        <p:nvCxnSpPr>
+          <p:cNvPr id="39" name="Straight Arrow Connector 38">
+            <a:extLst>
+              <a:ext uri="{FF2B5EF4-FFF2-40B4-BE49-F238E27FC236}">
+                <a16:creationId xmlns:a16="http://schemas.microsoft.com/office/drawing/2014/main" id="{3032D0B6-3D2F-E888-A23F-0A42ED93DDAA}"/>
+              </a:ext>
+            </a:extLst>
+          </p:cNvPr>
+          <p:cNvCxnSpPr>
+            <a:cxnSpLocks/>
+            <a:stCxn id="28" idx="3"/>
+            <a:endCxn id="31" idx="1"/>
+          </p:cNvCxnSpPr>
+          <p:nvPr/>
+        </p:nvCxnSpPr>
+        <p:spPr>
+          <a:xfrm>
+            <a:off x="6851369" y="3605741"/>
+            <a:ext cx="105497" cy="2655"/>
+          </a:xfrm>
+          <a:prstGeom prst="straightConnector1">
+            <a:avLst/>
+          </a:prstGeom>
+          <a:ln>
+            <a:solidFill>
+              <a:schemeClr val="tx1"/>
+            </a:solidFill>
+            <a:tailEnd type="triangle"/>
+          </a:ln>
+        </p:spPr>
+        <p:style>
+          <a:lnRef idx="2">
+            <a:schemeClr val="accent1"/>
+          </a:lnRef>
+          <a:fillRef idx="0">
+            <a:schemeClr val="accent1"/>
+          </a:fillRef>
+          <a:effectRef idx="1">
+            <a:schemeClr val="accent1"/>
+          </a:effectRef>
+          <a:fontRef idx="minor">
+            <a:schemeClr val="tx1"/>
+          </a:fontRef>
+        </p:style>
+      </p:cxnSp>
+      <p:cxnSp>
+        <p:nvCxnSpPr>
+          <p:cNvPr id="41" name="Connector: Elbow 40">
+            <a:extLst>
+              <a:ext uri="{FF2B5EF4-FFF2-40B4-BE49-F238E27FC236}">
+                <a16:creationId xmlns:a16="http://schemas.microsoft.com/office/drawing/2014/main" id="{6D845D4D-4C9A-6229-28C0-50F82DE33EB0}"/>
+              </a:ext>
+            </a:extLst>
+          </p:cNvPr>
+          <p:cNvCxnSpPr>
+            <a:cxnSpLocks/>
+            <a:stCxn id="31" idx="3"/>
+            <a:endCxn id="35" idx="1"/>
+          </p:cNvCxnSpPr>
+          <p:nvPr/>
+        </p:nvCxnSpPr>
+        <p:spPr>
+          <a:xfrm flipV="1">
+            <a:off x="7803641" y="3120563"/>
+            <a:ext cx="154725" cy="487837"/>
+          </a:xfrm>
+          <a:prstGeom prst="bentConnector3">
+            <a:avLst>
+              <a:gd name="adj1" fmla="val 50000"/>
+            </a:avLst>
+          </a:prstGeom>
+          <a:ln>
+            <a:solidFill>
+              <a:schemeClr val="tx1"/>
+            </a:solidFill>
+            <a:tailEnd type="triangle"/>
+          </a:ln>
+        </p:spPr>
+        <p:style>
+          <a:lnRef idx="2">
+            <a:schemeClr val="accent1"/>
+          </a:lnRef>
+          <a:fillRef idx="0">
+            <a:schemeClr val="accent1"/>
+          </a:fillRef>
+          <a:effectRef idx="1">
+            <a:schemeClr val="accent1"/>
+          </a:effectRef>
+          <a:fontRef idx="minor">
+            <a:schemeClr val="tx1"/>
+          </a:fontRef>
+        </p:style>
+      </p:cxnSp>
+      <p:cxnSp>
+        <p:nvCxnSpPr>
+          <p:cNvPr id="44" name="Connector: Elbow 43">
+            <a:extLst>
+              <a:ext uri="{FF2B5EF4-FFF2-40B4-BE49-F238E27FC236}">
+                <a16:creationId xmlns:a16="http://schemas.microsoft.com/office/drawing/2014/main" id="{87E7A8D5-4449-31E4-B94E-A45DD6432AB3}"/>
+              </a:ext>
+            </a:extLst>
+          </p:cNvPr>
+          <p:cNvCxnSpPr>
+            <a:cxnSpLocks/>
+            <a:stCxn id="31" idx="3"/>
+            <a:endCxn id="37" idx="1"/>
+          </p:cNvCxnSpPr>
+          <p:nvPr/>
+        </p:nvCxnSpPr>
+        <p:spPr>
+          <a:xfrm>
+            <a:off x="7803642" y="3608400"/>
+            <a:ext cx="154289" cy="545450"/>
+          </a:xfrm>
+          <a:prstGeom prst="bentConnector3">
+            <a:avLst>
+              <a:gd name="adj1" fmla="val 50000"/>
+            </a:avLst>
+          </a:prstGeom>
+          <a:ln>
+            <a:solidFill>
+              <a:schemeClr val="tx1"/>
+            </a:solidFill>
+            <a:tailEnd type="triangle"/>
+          </a:ln>
+        </p:spPr>
+        <p:style>
+          <a:lnRef idx="2">
+            <a:schemeClr val="accent1"/>
+          </a:lnRef>
+          <a:fillRef idx="0">
+            <a:schemeClr val="accent1"/>
+          </a:fillRef>
+          <a:effectRef idx="1">
+            <a:schemeClr val="accent1"/>
+          </a:effectRef>
+          <a:fontRef idx="minor">
+            <a:schemeClr val="tx1"/>
+          </a:fontRef>
+        </p:style>
+      </p:cxnSp>
+      <mc:AlternateContent xmlns:mc="http://schemas.openxmlformats.org/markup-compatibility/2006">
+        <mc:Choice xmlns:a14="http://schemas.microsoft.com/office/drawing/2010/main" Requires="a14">
+          <p:sp>
+            <p:nvSpPr>
+              <p:cNvPr id="46" name="TextBox 45">
+                <a:extLst>
+                  <a:ext uri="{FF2B5EF4-FFF2-40B4-BE49-F238E27FC236}">
+                    <a16:creationId xmlns:a16="http://schemas.microsoft.com/office/drawing/2014/main" id="{CBAC3F09-A2AB-8528-1516-C98D4545779F}"/>
+                  </a:ext>
+                </a:extLst>
+              </p:cNvPr>
+              <p:cNvSpPr txBox="1"/>
+              <p:nvPr/>
+            </p:nvSpPr>
+            <p:spPr>
+              <a:xfrm>
+                <a:off x="8079863" y="2545754"/>
+                <a:ext cx="457305" cy="264047"/>
+              </a:xfrm>
+              <a:prstGeom prst="rect">
+                <a:avLst/>
+              </a:prstGeom>
+              <a:noFill/>
+            </p:spPr>
+            <p:txBody>
+              <a:bodyPr wrap="none" rtlCol="0">
+                <a:spAutoFit/>
+              </a:bodyPr>
+              <a:lstStyle/>
+              <a:p>
+                <a:pPr/>
+                <a14:m>
+                  <m:oMathPara xmlns:m="http://schemas.openxmlformats.org/officeDocument/2006/math">
+                    <m:oMathParaPr>
+                      <m:jc m:val="centerGroup"/>
+                    </m:oMathParaPr>
+                    <m:oMath xmlns:m="http://schemas.openxmlformats.org/officeDocument/2006/math">
+                      <m:sSubSup>
+                        <m:sSubSupPr>
+                          <m:ctrlPr>
+                            <a:rPr lang="en-US" sz="1116" i="1">
+                              <a:latin typeface="Cambria Math" panose="02040503050406030204" pitchFamily="18" charset="0"/>
+                            </a:rPr>
+                          </m:ctrlPr>
+                        </m:sSubSupPr>
+                        <m:e>
+                          <m:r>
+                            <a:rPr lang="en-US" sz="1116" i="1">
+                              <a:latin typeface="Cambria Math" panose="02040503050406030204" pitchFamily="18" charset="0"/>
+                            </a:rPr>
+                            <m:t>𝑉</m:t>
+                          </m:r>
+                        </m:e>
+                        <m:sub>
+                          <m:r>
+                            <a:rPr lang="en-US" sz="1116" i="1">
+                              <a:latin typeface="Cambria Math" panose="02040503050406030204" pitchFamily="18" charset="0"/>
+                            </a:rPr>
+                            <m:t>𝐿𝐼𝐹</m:t>
+                          </m:r>
+                        </m:sub>
+                        <m:sup>
+                          <m:r>
+                            <a:rPr lang="en-US" sz="1116" i="1">
+                              <a:latin typeface="Cambria Math" panose="02040503050406030204" pitchFamily="18" charset="0"/>
+                            </a:rPr>
+                            <m:t>+</m:t>
+                          </m:r>
+                        </m:sup>
+                      </m:sSubSup>
+                    </m:oMath>
+                  </m:oMathPara>
+                </a14:m>
+                <a:endParaRPr lang="en-US" sz="1116" dirty="0"/>
+              </a:p>
+            </p:txBody>
+          </p:sp>
+        </mc:Choice>
+        <mc:Fallback>
+          <p:sp>
+            <p:nvSpPr>
+              <p:cNvPr id="46" name="TextBox 45">
+                <a:extLst>
+                  <a:ext uri="{FF2B5EF4-FFF2-40B4-BE49-F238E27FC236}">
+                    <a16:creationId xmlns:a16="http://schemas.microsoft.com/office/drawing/2014/main" id="{CBAC3F09-A2AB-8528-1516-C98D4545779F}"/>
+                  </a:ext>
+                </a:extLst>
+              </p:cNvPr>
+              <p:cNvSpPr txBox="1">
+                <a:spLocks noRot="1" noChangeAspect="1" noMove="1" noResize="1" noEditPoints="1" noAdjustHandles="1" noChangeArrowheads="1" noChangeShapeType="1" noTextEdit="1"/>
+              </p:cNvSpPr>
+              <p:nvPr/>
+            </p:nvSpPr>
+            <p:spPr>
+              <a:xfrm>
+                <a:off x="8079863" y="2545754"/>
+                <a:ext cx="457305" cy="264047"/>
+              </a:xfrm>
+              <a:prstGeom prst="rect">
+                <a:avLst/>
+              </a:prstGeom>
+              <a:blipFill>
+                <a:blip r:embed="rId12"/>
+                <a:stretch>
+                  <a:fillRect/>
+                </a:stretch>
+              </a:blipFill>
+            </p:spPr>
+            <p:txBody>
+              <a:bodyPr/>
+              <a:lstStyle/>
+              <a:p>
+                <a:r>
+                  <a:rPr lang="en-GB">
+                    <a:noFill/>
+                  </a:rPr>
+                  <a:t> </a:t>
+                </a:r>
+              </a:p>
+            </p:txBody>
+          </p:sp>
+        </mc:Fallback>
+      </mc:AlternateContent>
+      <mc:AlternateContent xmlns:mc="http://schemas.openxmlformats.org/markup-compatibility/2006">
+        <mc:Choice xmlns:a14="http://schemas.microsoft.com/office/drawing/2010/main" Requires="a14">
+          <p:sp>
+            <p:nvSpPr>
+              <p:cNvPr id="47" name="TextBox 46">
+                <a:extLst>
+                  <a:ext uri="{FF2B5EF4-FFF2-40B4-BE49-F238E27FC236}">
+                    <a16:creationId xmlns:a16="http://schemas.microsoft.com/office/drawing/2014/main" id="{E6A3B01E-03AD-47BA-A520-88DF39DE5F25}"/>
+                  </a:ext>
+                </a:extLst>
+              </p:cNvPr>
+              <p:cNvSpPr txBox="1"/>
+              <p:nvPr/>
+            </p:nvSpPr>
+            <p:spPr>
+              <a:xfrm>
+                <a:off x="8094909" y="3560041"/>
+                <a:ext cx="457305" cy="264047"/>
+              </a:xfrm>
+              <a:prstGeom prst="rect">
+                <a:avLst/>
+              </a:prstGeom>
+              <a:noFill/>
+            </p:spPr>
+            <p:txBody>
+              <a:bodyPr wrap="none" rtlCol="0">
+                <a:spAutoFit/>
+              </a:bodyPr>
+              <a:lstStyle/>
+              <a:p>
+                <a:pPr/>
+                <a14:m>
+                  <m:oMathPara xmlns:m="http://schemas.openxmlformats.org/officeDocument/2006/math">
+                    <m:oMathParaPr>
+                      <m:jc m:val="centerGroup"/>
+                    </m:oMathParaPr>
+                    <m:oMath xmlns:m="http://schemas.openxmlformats.org/officeDocument/2006/math">
+                      <m:sSubSup>
+                        <m:sSubSupPr>
+                          <m:ctrlPr>
+                            <a:rPr lang="en-US" sz="1116" i="1">
+                              <a:latin typeface="Cambria Math" panose="02040503050406030204" pitchFamily="18" charset="0"/>
+                            </a:rPr>
+                          </m:ctrlPr>
+                        </m:sSubSupPr>
+                        <m:e>
+                          <m:r>
+                            <a:rPr lang="en-US" sz="1116" i="1">
+                              <a:latin typeface="Cambria Math" panose="02040503050406030204" pitchFamily="18" charset="0"/>
+                            </a:rPr>
+                            <m:t>𝑉</m:t>
+                          </m:r>
+                        </m:e>
+                        <m:sub>
+                          <m:r>
+                            <a:rPr lang="en-US" sz="1116" i="1">
+                              <a:latin typeface="Cambria Math" panose="02040503050406030204" pitchFamily="18" charset="0"/>
+                            </a:rPr>
+                            <m:t>𝐿𝐼𝐹</m:t>
+                          </m:r>
+                        </m:sub>
+                        <m:sup>
+                          <m:r>
+                            <a:rPr lang="en-US" sz="1116" i="1">
+                              <a:latin typeface="Cambria Math" panose="02040503050406030204" pitchFamily="18" charset="0"/>
+                            </a:rPr>
+                            <m:t>−</m:t>
+                          </m:r>
+                        </m:sup>
+                      </m:sSubSup>
+                    </m:oMath>
+                  </m:oMathPara>
+                </a14:m>
+                <a:endParaRPr lang="en-US" sz="1116" dirty="0"/>
+              </a:p>
+            </p:txBody>
+          </p:sp>
+        </mc:Choice>
+        <mc:Fallback>
+          <p:sp>
+            <p:nvSpPr>
+              <p:cNvPr id="47" name="TextBox 46">
+                <a:extLst>
+                  <a:ext uri="{FF2B5EF4-FFF2-40B4-BE49-F238E27FC236}">
+                    <a16:creationId xmlns:a16="http://schemas.microsoft.com/office/drawing/2014/main" id="{E6A3B01E-03AD-47BA-A520-88DF39DE5F25}"/>
+                  </a:ext>
+                </a:extLst>
+              </p:cNvPr>
+              <p:cNvSpPr txBox="1">
+                <a:spLocks noRot="1" noChangeAspect="1" noMove="1" noResize="1" noEditPoints="1" noAdjustHandles="1" noChangeArrowheads="1" noChangeShapeType="1" noTextEdit="1"/>
+              </p:cNvSpPr>
+              <p:nvPr/>
+            </p:nvSpPr>
+            <p:spPr>
+              <a:xfrm>
+                <a:off x="8094909" y="3560041"/>
+                <a:ext cx="457305" cy="264047"/>
+              </a:xfrm>
+              <a:prstGeom prst="rect">
+                <a:avLst/>
+              </a:prstGeom>
+              <a:blipFill>
+                <a:blip r:embed="rId13"/>
+                <a:stretch>
+                  <a:fillRect/>
+                </a:stretch>
+              </a:blipFill>
+            </p:spPr>
+            <p:txBody>
+              <a:bodyPr/>
+              <a:lstStyle/>
+              <a:p>
+                <a:r>
+                  <a:rPr lang="en-GB">
+                    <a:noFill/>
+                  </a:rPr>
+                  <a:t> </a:t>
+                </a:r>
+              </a:p>
+            </p:txBody>
+          </p:sp>
+        </mc:Fallback>
+      </mc:AlternateContent>
+      <p:pic>
+        <p:nvPicPr>
+          <p:cNvPr id="49" name="Picture 48" descr="A blue and red paint on a white background&#10;&#10;AI-generated content may be incorrect.">
+            <a:extLst>
+              <a:ext uri="{FF2B5EF4-FFF2-40B4-BE49-F238E27FC236}">
+                <a16:creationId xmlns:a16="http://schemas.microsoft.com/office/drawing/2014/main" id="{62371220-E686-0308-1FCE-21A12C719CB5}"/>
+              </a:ext>
+            </a:extLst>
+          </p:cNvPr>
+          <p:cNvPicPr>
+            <a:picLocks noChangeAspect="1"/>
+          </p:cNvPicPr>
+          <p:nvPr/>
+        </p:nvPicPr>
+        <p:blipFill>
+          <a:blip r:embed="rId14">
+            <a:extLst>
+              <a:ext uri="{28A0092B-C50C-407E-A947-70E740481C1C}">
+                <a14:useLocalDpi xmlns:a14="http://schemas.microsoft.com/office/drawing/2010/main" val="0"/>
+              </a:ext>
+            </a:extLst>
+          </a:blip>
+          <a:stretch>
+            <a:fillRect/>
+          </a:stretch>
+        </p:blipFill>
+        <p:spPr>
+          <a:xfrm>
+            <a:off x="9038916" y="2875622"/>
+            <a:ext cx="1538955" cy="1457325"/>
+          </a:xfrm>
+          <a:prstGeom prst="rect">
+            <a:avLst/>
+          </a:prstGeom>
+          <a:ln>
+            <a:solidFill>
+              <a:schemeClr val="tx1"/>
+            </a:solidFill>
+          </a:ln>
+        </p:spPr>
+      </p:pic>
+      <p:sp>
+        <p:nvSpPr>
+          <p:cNvPr id="59" name="Arrow: Right 58">
+            <a:extLst>
+              <a:ext uri="{FF2B5EF4-FFF2-40B4-BE49-F238E27FC236}">
+                <a16:creationId xmlns:a16="http://schemas.microsoft.com/office/drawing/2014/main" id="{A134A001-663E-0EED-A11A-A8C34D43C153}"/>
+              </a:ext>
+            </a:extLst>
+          </p:cNvPr>
+          <p:cNvSpPr/>
+          <p:nvPr/>
+        </p:nvSpPr>
+        <p:spPr>
+          <a:xfrm>
+            <a:off x="8806040" y="3549061"/>
+            <a:ext cx="221444" cy="146264"/>
+          </a:xfrm>
+          <a:prstGeom prst="rightArrow">
+            <a:avLst/>
+          </a:prstGeom>
+        </p:spPr>
+        <p:style>
+          <a:lnRef idx="2">
+            <a:schemeClr val="accent6">
+              <a:shade val="15000"/>
+            </a:schemeClr>
+          </a:lnRef>
+          <a:fillRef idx="1">
+            <a:schemeClr val="accent6"/>
+          </a:fillRef>
+          <a:effectRef idx="0">
+            <a:schemeClr val="accent6"/>
+          </a:effectRef>
+          <a:fontRef idx="minor">
+            <a:schemeClr val="lt1"/>
+          </a:fontRef>
+        </p:style>
+        <p:txBody>
+          <a:bodyPr rtlCol="0" anchor="ctr"/>
+          <a:lstStyle/>
+          <a:p>
+            <a:pPr algn="ctr"/>
+            <a:endParaRPr lang="en-US" sz="1435" dirty="0"/>
+          </a:p>
+        </p:txBody>
+      </p:sp>
+      <p:sp>
+        <p:nvSpPr>
+          <p:cNvPr id="64" name="Rectangle: Rounded Corners 63">
+            <a:extLst>
+              <a:ext uri="{FF2B5EF4-FFF2-40B4-BE49-F238E27FC236}">
+                <a16:creationId xmlns:a16="http://schemas.microsoft.com/office/drawing/2014/main" id="{AC95D86E-4814-D89D-B095-C27BCBDDE0F1}"/>
+              </a:ext>
+            </a:extLst>
+          </p:cNvPr>
+          <p:cNvSpPr/>
+          <p:nvPr/>
+        </p:nvSpPr>
+        <p:spPr>
+          <a:xfrm>
+            <a:off x="11160403" y="1075138"/>
+            <a:ext cx="1254203" cy="967251"/>
+          </a:xfrm>
+          <a:prstGeom prst="roundRect">
+            <a:avLst/>
+          </a:prstGeom>
+          <a:noFill/>
+          <a:ln w="28575" cap="flat" cmpd="sng" algn="ctr">
+            <a:solidFill>
+              <a:schemeClr val="accent2"/>
+            </a:solidFill>
+            <a:prstDash val="solid"/>
+            <a:round/>
+            <a:headEnd type="none" w="med" len="med"/>
+            <a:tailEnd type="none" w="med" len="med"/>
+          </a:ln>
+        </p:spPr>
+        <p:style>
+          <a:lnRef idx="0">
+            <a:scrgbClr r="0" g="0" b="0"/>
+          </a:lnRef>
+          <a:fillRef idx="0">
+            <a:scrgbClr r="0" g="0" b="0"/>
+          </a:fillRef>
+          <a:effectRef idx="0">
+            <a:scrgbClr r="0" g="0" b="0"/>
+          </a:effectRef>
+          <a:fontRef idx="minor">
+            <a:schemeClr val="accent2"/>
+          </a:fontRef>
+        </p:style>
+        <p:txBody>
+          <a:bodyPr rtlCol="0" anchor="ctr"/>
+          <a:lstStyle/>
+          <a:p>
+            <a:pPr algn="ctr"/>
+            <a:r>
+              <a:rPr lang="en-US" b="1" dirty="0"/>
+              <a:t>Neural Network</a:t>
+            </a:r>
+          </a:p>
+        </p:txBody>
+      </p:sp>
+      <p:sp>
+        <p:nvSpPr>
+          <p:cNvPr id="65" name="Rectangle: Rounded Corners 64">
+            <a:extLst>
+              <a:ext uri="{FF2B5EF4-FFF2-40B4-BE49-F238E27FC236}">
+                <a16:creationId xmlns:a16="http://schemas.microsoft.com/office/drawing/2014/main" id="{692BA42E-3F98-ABC5-89C0-10953595D387}"/>
+              </a:ext>
+            </a:extLst>
+          </p:cNvPr>
+          <p:cNvSpPr/>
+          <p:nvPr/>
+        </p:nvSpPr>
+        <p:spPr>
+          <a:xfrm>
+            <a:off x="11166850" y="3118277"/>
+            <a:ext cx="1254203" cy="967251"/>
+          </a:xfrm>
+          <a:prstGeom prst="roundRect">
+            <a:avLst/>
+          </a:prstGeom>
+          <a:noFill/>
+          <a:ln w="28575" cap="flat" cmpd="sng" algn="ctr">
+            <a:solidFill>
+              <a:schemeClr val="accent2"/>
+            </a:solidFill>
+            <a:prstDash val="solid"/>
+            <a:round/>
+            <a:headEnd type="none" w="med" len="med"/>
+            <a:tailEnd type="none" w="med" len="med"/>
+          </a:ln>
+        </p:spPr>
+        <p:style>
+          <a:lnRef idx="0">
+            <a:scrgbClr r="0" g="0" b="0"/>
+          </a:lnRef>
+          <a:fillRef idx="0">
+            <a:scrgbClr r="0" g="0" b="0"/>
+          </a:fillRef>
+          <a:effectRef idx="0">
+            <a:scrgbClr r="0" g="0" b="0"/>
+          </a:effectRef>
+          <a:fontRef idx="minor">
+            <a:schemeClr val="accent2"/>
+          </a:fontRef>
+        </p:style>
+        <p:txBody>
+          <a:bodyPr rtlCol="0" anchor="ctr"/>
+          <a:lstStyle/>
+          <a:p>
+            <a:pPr algn="ctr"/>
+            <a:r>
+              <a:rPr lang="en-US" b="1" dirty="0"/>
+              <a:t>Neural Network</a:t>
+            </a:r>
+          </a:p>
+        </p:txBody>
+      </p:sp>
+      <p:sp>
+        <p:nvSpPr>
+          <p:cNvPr id="66" name="Rectangle: Rounded Corners 65">
+            <a:extLst>
+              <a:ext uri="{FF2B5EF4-FFF2-40B4-BE49-F238E27FC236}">
+                <a16:creationId xmlns:a16="http://schemas.microsoft.com/office/drawing/2014/main" id="{8BB66854-451B-B31B-343B-8D421C862095}"/>
+              </a:ext>
+            </a:extLst>
+          </p:cNvPr>
+          <p:cNvSpPr/>
+          <p:nvPr/>
+        </p:nvSpPr>
+        <p:spPr>
+          <a:xfrm>
+            <a:off x="11160403" y="2350920"/>
+            <a:ext cx="1254203" cy="496522"/>
+          </a:xfrm>
+          <a:prstGeom prst="roundRect">
+            <a:avLst/>
+          </a:prstGeom>
+          <a:noFill/>
+          <a:ln w="28575" cap="flat" cmpd="sng" algn="ctr">
+            <a:solidFill>
+              <a:schemeClr val="accent6"/>
+            </a:solidFill>
+            <a:prstDash val="solid"/>
+            <a:round/>
+            <a:headEnd type="none" w="med" len="med"/>
+            <a:tailEnd type="none" w="med" len="med"/>
+          </a:ln>
+        </p:spPr>
+        <p:style>
+          <a:lnRef idx="0">
+            <a:scrgbClr r="0" g="0" b="0"/>
+          </a:lnRef>
+          <a:fillRef idx="0">
+            <a:scrgbClr r="0" g="0" b="0"/>
+          </a:fillRef>
+          <a:effectRef idx="0">
+            <a:scrgbClr r="0" g="0" b="0"/>
+          </a:effectRef>
+          <a:fontRef idx="minor">
+            <a:schemeClr val="accent6"/>
+          </a:fontRef>
+        </p:style>
+        <p:txBody>
+          <a:bodyPr rtlCol="0" anchor="ctr"/>
+          <a:lstStyle/>
+          <a:p>
+            <a:pPr algn="ctr"/>
+            <a:r>
+              <a:rPr lang="en-US" b="1" dirty="0"/>
+              <a:t>Compare</a:t>
+            </a:r>
+          </a:p>
+        </p:txBody>
+      </p:sp>
+      <p:cxnSp>
+        <p:nvCxnSpPr>
+          <p:cNvPr id="68" name="Straight Arrow Connector 67">
+            <a:extLst>
+              <a:ext uri="{FF2B5EF4-FFF2-40B4-BE49-F238E27FC236}">
+                <a16:creationId xmlns:a16="http://schemas.microsoft.com/office/drawing/2014/main" id="{7B80E8CF-B48C-3168-E3F8-01831479CF9A}"/>
+              </a:ext>
+            </a:extLst>
+          </p:cNvPr>
+          <p:cNvCxnSpPr>
+            <a:stCxn id="18" idx="3"/>
+            <a:endCxn id="64" idx="1"/>
+          </p:cNvCxnSpPr>
+          <p:nvPr/>
+        </p:nvCxnSpPr>
+        <p:spPr>
+          <a:xfrm>
+            <a:off x="10577873" y="1553724"/>
+            <a:ext cx="582531" cy="5041"/>
+          </a:xfrm>
+          <a:prstGeom prst="straightConnector1">
+            <a:avLst/>
+          </a:prstGeom>
+          <a:ln w="57150">
+            <a:solidFill>
+              <a:schemeClr val="tx1"/>
+            </a:solidFill>
+            <a:tailEnd type="triangle"/>
+          </a:ln>
+        </p:spPr>
+        <p:style>
+          <a:lnRef idx="2">
+            <a:schemeClr val="accent1"/>
+          </a:lnRef>
+          <a:fillRef idx="0">
+            <a:schemeClr val="accent1"/>
+          </a:fillRef>
+          <a:effectRef idx="1">
+            <a:schemeClr val="accent1"/>
+          </a:effectRef>
+          <a:fontRef idx="minor">
+            <a:schemeClr val="tx1"/>
+          </a:fontRef>
+        </p:style>
+      </p:cxnSp>
+      <p:cxnSp>
+        <p:nvCxnSpPr>
+          <p:cNvPr id="70" name="Straight Arrow Connector 69">
+            <a:extLst>
+              <a:ext uri="{FF2B5EF4-FFF2-40B4-BE49-F238E27FC236}">
+                <a16:creationId xmlns:a16="http://schemas.microsoft.com/office/drawing/2014/main" id="{77C2C564-32B2-E1AF-C227-02408156E2DB}"/>
+              </a:ext>
+            </a:extLst>
+          </p:cNvPr>
+          <p:cNvCxnSpPr>
+            <a:cxnSpLocks/>
+            <a:stCxn id="64" idx="2"/>
+            <a:endCxn id="66" idx="0"/>
+          </p:cNvCxnSpPr>
+          <p:nvPr/>
+        </p:nvCxnSpPr>
+        <p:spPr>
+          <a:xfrm flipH="1">
+            <a:off x="11787506" y="2042389"/>
+            <a:ext cx="1" cy="308531"/>
+          </a:xfrm>
+          <a:prstGeom prst="straightConnector1">
+            <a:avLst/>
+          </a:prstGeom>
+          <a:ln w="57150">
+            <a:solidFill>
+              <a:schemeClr val="tx1"/>
+            </a:solidFill>
+            <a:tailEnd type="triangle"/>
+          </a:ln>
+        </p:spPr>
+        <p:style>
+          <a:lnRef idx="2">
+            <a:schemeClr val="accent1"/>
+          </a:lnRef>
+          <a:fillRef idx="0">
+            <a:schemeClr val="accent1"/>
+          </a:fillRef>
+          <a:effectRef idx="1">
+            <a:schemeClr val="accent1"/>
+          </a:effectRef>
+          <a:fontRef idx="minor">
+            <a:schemeClr val="tx1"/>
+          </a:fontRef>
+        </p:style>
+      </p:cxnSp>
+      <p:cxnSp>
+        <p:nvCxnSpPr>
+          <p:cNvPr id="72" name="Straight Arrow Connector 71">
+            <a:extLst>
+              <a:ext uri="{FF2B5EF4-FFF2-40B4-BE49-F238E27FC236}">
+                <a16:creationId xmlns:a16="http://schemas.microsoft.com/office/drawing/2014/main" id="{4797BC60-95E9-B212-E284-F45186E0FCD0}"/>
+              </a:ext>
+            </a:extLst>
+          </p:cNvPr>
+          <p:cNvCxnSpPr>
+            <a:cxnSpLocks/>
+            <a:stCxn id="65" idx="0"/>
+            <a:endCxn id="66" idx="2"/>
+          </p:cNvCxnSpPr>
+          <p:nvPr/>
+        </p:nvCxnSpPr>
+        <p:spPr>
+          <a:xfrm flipH="1" flipV="1">
+            <a:off x="11787503" y="2847444"/>
+            <a:ext cx="6449" cy="270835"/>
+          </a:xfrm>
+          <a:prstGeom prst="straightConnector1">
+            <a:avLst/>
+          </a:prstGeom>
+          <a:ln w="57150">
+            <a:solidFill>
+              <a:schemeClr val="tx1"/>
+            </a:solidFill>
+            <a:tailEnd type="triangle"/>
+          </a:ln>
+        </p:spPr>
+        <p:style>
+          <a:lnRef idx="2">
+            <a:schemeClr val="accent1"/>
+          </a:lnRef>
+          <a:fillRef idx="0">
+            <a:schemeClr val="accent1"/>
+          </a:fillRef>
+          <a:effectRef idx="1">
+            <a:schemeClr val="accent1"/>
+          </a:effectRef>
+          <a:fontRef idx="minor">
+            <a:schemeClr val="tx1"/>
+          </a:fontRef>
+        </p:style>
+      </p:cxnSp>
+      <p:cxnSp>
+        <p:nvCxnSpPr>
+          <p:cNvPr id="74" name="Straight Arrow Connector 73">
+            <a:extLst>
+              <a:ext uri="{FF2B5EF4-FFF2-40B4-BE49-F238E27FC236}">
+                <a16:creationId xmlns:a16="http://schemas.microsoft.com/office/drawing/2014/main" id="{B8E7FB49-6C3F-CD7C-39DF-0236AD01F8BD}"/>
+              </a:ext>
+            </a:extLst>
+          </p:cNvPr>
+          <p:cNvCxnSpPr>
+            <a:cxnSpLocks/>
+            <a:stCxn id="49" idx="3"/>
+            <a:endCxn id="65" idx="1"/>
+          </p:cNvCxnSpPr>
+          <p:nvPr/>
+        </p:nvCxnSpPr>
+        <p:spPr>
+          <a:xfrm flipV="1">
+            <a:off x="10577872" y="3601903"/>
+            <a:ext cx="588978" cy="2384"/>
+          </a:xfrm>
+          <a:prstGeom prst="straightConnector1">
+            <a:avLst/>
+          </a:prstGeom>
+          <a:ln w="57150">
+            <a:solidFill>
+              <a:schemeClr val="tx1"/>
+            </a:solidFill>
+            <a:tailEnd type="triangle"/>
+          </a:ln>
+        </p:spPr>
+        <p:style>
+          <a:lnRef idx="2">
+            <a:schemeClr val="accent1"/>
+          </a:lnRef>
+          <a:fillRef idx="0">
+            <a:schemeClr val="accent1"/>
+          </a:fillRef>
+          <a:effectRef idx="1">
+            <a:schemeClr val="accent1"/>
+          </a:effectRef>
+          <a:fontRef idx="minor">
+            <a:schemeClr val="tx1"/>
+          </a:fontRef>
+        </p:style>
+      </p:cxnSp>
+      <p:sp>
+        <p:nvSpPr>
+          <p:cNvPr id="77" name="TextBox 76">
+            <a:extLst>
+              <a:ext uri="{FF2B5EF4-FFF2-40B4-BE49-F238E27FC236}">
+                <a16:creationId xmlns:a16="http://schemas.microsoft.com/office/drawing/2014/main" id="{481B009B-CB49-840B-53FB-4E76739F25A1}"/>
+              </a:ext>
+            </a:extLst>
+          </p:cNvPr>
+          <p:cNvSpPr txBox="1"/>
+          <p:nvPr/>
+        </p:nvSpPr>
+        <p:spPr>
+          <a:xfrm>
+            <a:off x="10700931" y="480308"/>
+            <a:ext cx="393056" cy="386709"/>
+          </a:xfrm>
+          <a:prstGeom prst="rect">
+            <a:avLst/>
+          </a:prstGeom>
+          <a:noFill/>
+        </p:spPr>
+        <p:txBody>
+          <a:bodyPr wrap="none" rtlCol="0">
+            <a:spAutoFit/>
+          </a:bodyPr>
+          <a:lstStyle/>
+          <a:p>
+            <a:r>
+              <a:rPr lang="en-US" sz="1913" b="1" dirty="0"/>
+              <a:t>e)</a:t>
+            </a:r>
+          </a:p>
+        </p:txBody>
+      </p:sp>
+      <p:pic>
+        <p:nvPicPr>
+          <p:cNvPr id="90" name="Picture 89">
+            <a:extLst>
+              <a:ext uri="{FF2B5EF4-FFF2-40B4-BE49-F238E27FC236}">
+                <a16:creationId xmlns:a16="http://schemas.microsoft.com/office/drawing/2014/main" id="{0806DBDC-266F-C399-766C-17C39445C491}"/>
+              </a:ext>
+            </a:extLst>
+          </p:cNvPr>
+          <p:cNvPicPr>
+            <a:picLocks noChangeAspect="1"/>
+          </p:cNvPicPr>
+          <p:nvPr/>
+        </p:nvPicPr>
+        <p:blipFill>
+          <a:blip r:embed="rId15" cstate="print">
+            <a:extLst>
+              <a:ext uri="{28A0092B-C50C-407E-A947-70E740481C1C}">
+                <a14:useLocalDpi xmlns:a14="http://schemas.microsoft.com/office/drawing/2010/main" val="0"/>
+              </a:ext>
+            </a:extLst>
+          </a:blip>
+          <a:srcRect/>
+          <a:stretch/>
+        </p:blipFill>
+        <p:spPr>
+          <a:xfrm rot="16200000">
+            <a:off x="8731150" y="5170913"/>
+            <a:ext cx="659892" cy="682098"/>
+          </a:xfrm>
+          <a:prstGeom prst="rect">
+            <a:avLst/>
+          </a:prstGeom>
+          <a:effectLst>
+            <a:softEdge rad="635000"/>
+          </a:effectLst>
+          <a:scene3d>
+            <a:camera prst="perspectiveRelaxed" fov="3900000">
+              <a:rot lat="19787143" lon="18897834" rev="3569538"/>
+            </a:camera>
+            <a:lightRig rig="flood" dir="t"/>
+          </a:scene3d>
+          <a:sp3d z="107950" extrusionH="133350" prstMaterial="matte">
+            <a:bevelT w="19050" h="38100"/>
+            <a:bevelB w="0" h="0"/>
+            <a:extrusionClr>
+              <a:schemeClr val="tx1">
+                <a:lumMod val="85000"/>
+                <a:lumOff val="15000"/>
+              </a:schemeClr>
+            </a:extrusionClr>
+          </a:sp3d>
+        </p:spPr>
+      </p:pic>
+      <p:pic>
+        <p:nvPicPr>
+          <p:cNvPr id="97" name="Picture 96" descr="A person with his hand up&#10;&#10;AI-generated content may be incorrect.">
+            <a:extLst>
+              <a:ext uri="{FF2B5EF4-FFF2-40B4-BE49-F238E27FC236}">
+                <a16:creationId xmlns:a16="http://schemas.microsoft.com/office/drawing/2014/main" id="{331A387B-A515-43E0-3CA6-5C0E128EA682}"/>
+              </a:ext>
+            </a:extLst>
+          </p:cNvPr>
+          <p:cNvPicPr>
+            <a:picLocks noChangeAspect="1"/>
+          </p:cNvPicPr>
+          <p:nvPr/>
+        </p:nvPicPr>
+        <p:blipFill>
+          <a:blip r:embed="rId4">
+            <a:extLst>
+              <a:ext uri="{28A0092B-C50C-407E-A947-70E740481C1C}">
+                <a14:useLocalDpi xmlns:a14="http://schemas.microsoft.com/office/drawing/2010/main" val="0"/>
+              </a:ext>
+            </a:extLst>
+          </a:blip>
+          <a:stretch>
+            <a:fillRect/>
+          </a:stretch>
+        </p:blipFill>
+        <p:spPr>
+          <a:xfrm>
+            <a:off x="3205789" y="2739764"/>
+            <a:ext cx="1877370" cy="1777788"/>
+          </a:xfrm>
+          <a:prstGeom prst="rect">
+            <a:avLst/>
+          </a:prstGeom>
+        </p:spPr>
+      </p:pic>
+      <p:pic>
+        <p:nvPicPr>
+          <p:cNvPr id="108" name="Picture 107">
+            <a:extLst>
+              <a:ext uri="{FF2B5EF4-FFF2-40B4-BE49-F238E27FC236}">
+                <a16:creationId xmlns:a16="http://schemas.microsoft.com/office/drawing/2014/main" id="{811D98DA-4B93-DD94-1906-B1DA20F38C9B}"/>
+              </a:ext>
+            </a:extLst>
+          </p:cNvPr>
+          <p:cNvPicPr>
+            <a:picLocks noChangeAspect="1"/>
+          </p:cNvPicPr>
+          <p:nvPr/>
+        </p:nvPicPr>
+        <p:blipFill>
+          <a:blip r:embed="rId16">
+            <a:extLst>
+              <a:ext uri="{BEBA8EAE-BF5A-486C-A8C5-ECC9F3942E4B}">
+                <a14:imgProps xmlns:a14="http://schemas.microsoft.com/office/drawing/2010/main">
+                  <a14:imgLayer r:embed="rId17">
+                    <a14:imgEffect>
+                      <a14:backgroundRemoval t="10000" b="90000" l="10000" r="90000"/>
+                    </a14:imgEffect>
+                  </a14:imgLayer>
+                </a14:imgProps>
+              </a:ext>
+            </a:extLst>
+          </a:blip>
+          <a:stretch>
+            <a:fillRect/>
+          </a:stretch>
+        </p:blipFill>
+        <p:spPr>
+          <a:xfrm rot="16200000">
+            <a:off x="8370054" y="5333894"/>
+            <a:ext cx="600908" cy="330587"/>
+          </a:xfrm>
+          <a:prstGeom prst="rect">
+            <a:avLst/>
+          </a:prstGeom>
+        </p:spPr>
+      </p:pic>
+      <p:cxnSp>
+        <p:nvCxnSpPr>
+          <p:cNvPr id="115" name="Straight Connector 114">
+            <a:extLst>
+              <a:ext uri="{FF2B5EF4-FFF2-40B4-BE49-F238E27FC236}">
+                <a16:creationId xmlns:a16="http://schemas.microsoft.com/office/drawing/2014/main" id="{9292D6B1-3F48-612D-1C62-813A480AE9FD}"/>
+              </a:ext>
+            </a:extLst>
+          </p:cNvPr>
+          <p:cNvCxnSpPr>
+            <a:cxnSpLocks/>
+          </p:cNvCxnSpPr>
+          <p:nvPr/>
+        </p:nvCxnSpPr>
+        <p:spPr>
+          <a:xfrm flipH="1" flipV="1">
+            <a:off x="5083159" y="2739766"/>
+            <a:ext cx="838709" cy="392372"/>
+          </a:xfrm>
+          <a:prstGeom prst="line">
+            <a:avLst/>
+          </a:prstGeom>
+          <a:ln w="57150">
+            <a:solidFill>
+              <a:schemeClr val="tx1"/>
+            </a:solidFill>
+          </a:ln>
+        </p:spPr>
+        <p:style>
+          <a:lnRef idx="2">
+            <a:schemeClr val="accent1"/>
+          </a:lnRef>
+          <a:fillRef idx="0">
+            <a:schemeClr val="accent1"/>
+          </a:fillRef>
+          <a:effectRef idx="1">
+            <a:schemeClr val="accent1"/>
+          </a:effectRef>
+          <a:fontRef idx="minor">
+            <a:schemeClr val="tx1"/>
+          </a:fontRef>
+        </p:style>
+      </p:cxnSp>
+      <p:cxnSp>
+        <p:nvCxnSpPr>
+          <p:cNvPr id="117" name="Straight Connector 116">
+            <a:extLst>
+              <a:ext uri="{FF2B5EF4-FFF2-40B4-BE49-F238E27FC236}">
+                <a16:creationId xmlns:a16="http://schemas.microsoft.com/office/drawing/2014/main" id="{5BD05116-9815-78F7-E91A-5133BB07870F}"/>
+              </a:ext>
+            </a:extLst>
+          </p:cNvPr>
+          <p:cNvCxnSpPr>
+            <a:cxnSpLocks/>
+          </p:cNvCxnSpPr>
+          <p:nvPr/>
+        </p:nvCxnSpPr>
+        <p:spPr>
+          <a:xfrm flipH="1">
+            <a:off x="5076529" y="4085528"/>
+            <a:ext cx="851314" cy="424492"/>
+          </a:xfrm>
+          <a:prstGeom prst="line">
+            <a:avLst/>
+          </a:prstGeom>
+          <a:ln w="57150">
+            <a:solidFill>
+              <a:schemeClr val="tx1"/>
+            </a:solidFill>
+          </a:ln>
+        </p:spPr>
+        <p:style>
+          <a:lnRef idx="2">
+            <a:schemeClr val="accent1"/>
+          </a:lnRef>
+          <a:fillRef idx="0">
+            <a:schemeClr val="accent1"/>
+          </a:fillRef>
+          <a:effectRef idx="1">
+            <a:schemeClr val="accent1"/>
+          </a:effectRef>
+          <a:fontRef idx="minor">
+            <a:schemeClr val="tx1"/>
+          </a:fontRef>
+        </p:style>
+      </p:cxnSp>
+      <p:graphicFrame>
+        <p:nvGraphicFramePr>
+          <p:cNvPr id="126" name="Object 10">
+            <a:extLst>
+              <a:ext uri="{FF2B5EF4-FFF2-40B4-BE49-F238E27FC236}">
+                <a16:creationId xmlns:a16="http://schemas.microsoft.com/office/drawing/2014/main" id="{B53B7F2A-E48E-83EF-65A1-FA4D81BBEF2D}"/>
+              </a:ext>
+            </a:extLst>
+          </p:cNvPr>
+          <p:cNvGraphicFramePr>
+            <a:graphicFrameLocks noChangeAspect="1"/>
+          </p:cNvGraphicFramePr>
+          <p:nvPr/>
+        </p:nvGraphicFramePr>
+        <p:xfrm>
+          <a:off x="11086273" y="4955693"/>
+          <a:ext cx="1231666" cy="1112241"/>
+        </p:xfrm>
+        <a:graphic>
+          <a:graphicData uri="http://schemas.openxmlformats.org/presentationml/2006/ole">
+            <mc:AlternateContent xmlns:mc="http://schemas.openxmlformats.org/markup-compatibility/2006">
+              <mc:Choice xmlns:v="urn:schemas-microsoft-com:vml" Requires="v">
+                <p:oleObj name="Picture" r:id="rId18" imgW="2173680" imgH="1965240" progId="Word.Picture.8">
+                  <p:embed/>
+                </p:oleObj>
+              </mc:Choice>
+              <mc:Fallback>
+                <p:oleObj name="Picture" r:id="rId18" imgW="2173680" imgH="1965240" progId="Word.Picture.8">
+                  <p:embed/>
+                  <p:pic>
+                    <p:nvPicPr>
+                      <p:cNvPr id="126" name="Object 10">
+                        <a:extLst>
+                          <a:ext uri="{FF2B5EF4-FFF2-40B4-BE49-F238E27FC236}">
+                            <a16:creationId xmlns:a16="http://schemas.microsoft.com/office/drawing/2014/main" id="{B53B7F2A-E48E-83EF-65A1-FA4D81BBEF2D}"/>
+                          </a:ext>
+                        </a:extLst>
+                      </p:cNvPr>
+                      <p:cNvPicPr>
+                        <a:picLocks noChangeAspect="1" noChangeArrowheads="1"/>
+                      </p:cNvPicPr>
+                      <p:nvPr/>
+                    </p:nvPicPr>
+                    <p:blipFill>
+                      <a:blip r:embed="rId19"/>
+                      <a:srcRect/>
+                      <a:stretch>
+                        <a:fillRect/>
+                      </a:stretch>
+                    </p:blipFill>
+                    <p:spPr bwMode="auto">
+                      <a:xfrm>
+                        <a:off x="11086273" y="4955693"/>
+                        <a:ext cx="1231666" cy="1112241"/>
+                      </a:xfrm>
+                      <a:prstGeom prst="rect">
+                        <a:avLst/>
+                      </a:prstGeom>
+                      <a:noFill/>
+                      <a:ln>
+                        <a:noFill/>
+                      </a:ln>
+                    </p:spPr>
+                  </p:pic>
+                </p:oleObj>
+              </mc:Fallback>
+            </mc:AlternateContent>
+          </a:graphicData>
+        </a:graphic>
+      </p:graphicFrame>
+      <p:cxnSp>
+        <p:nvCxnSpPr>
+          <p:cNvPr id="130" name="Straight Connector 129">
+            <a:extLst>
+              <a:ext uri="{FF2B5EF4-FFF2-40B4-BE49-F238E27FC236}">
+                <a16:creationId xmlns:a16="http://schemas.microsoft.com/office/drawing/2014/main" id="{AEE10B21-BE27-107E-E034-AC39899A422F}"/>
+              </a:ext>
+            </a:extLst>
+          </p:cNvPr>
+          <p:cNvCxnSpPr>
+            <a:cxnSpLocks/>
+          </p:cNvCxnSpPr>
+          <p:nvPr/>
+        </p:nvCxnSpPr>
+        <p:spPr>
+          <a:xfrm flipH="1">
+            <a:off x="10620721" y="4955693"/>
+            <a:ext cx="521228" cy="409548"/>
+          </a:xfrm>
+          <a:prstGeom prst="line">
+            <a:avLst/>
+          </a:prstGeom>
+        </p:spPr>
+        <p:style>
+          <a:lnRef idx="2">
+            <a:schemeClr val="dk1"/>
+          </a:lnRef>
+          <a:fillRef idx="0">
+            <a:schemeClr val="dk1"/>
+          </a:fillRef>
+          <a:effectRef idx="1">
+            <a:schemeClr val="dk1"/>
+          </a:effectRef>
+          <a:fontRef idx="minor">
+            <a:schemeClr val="tx1"/>
+          </a:fontRef>
+        </p:style>
+      </p:cxnSp>
+      <p:cxnSp>
+        <p:nvCxnSpPr>
+          <p:cNvPr id="133" name="Straight Connector 132">
+            <a:extLst>
+              <a:ext uri="{FF2B5EF4-FFF2-40B4-BE49-F238E27FC236}">
+                <a16:creationId xmlns:a16="http://schemas.microsoft.com/office/drawing/2014/main" id="{F414C473-2AB9-D39D-D6EA-7101BD0B8A86}"/>
+              </a:ext>
+            </a:extLst>
+          </p:cNvPr>
+          <p:cNvCxnSpPr>
+            <a:cxnSpLocks/>
+          </p:cNvCxnSpPr>
+          <p:nvPr/>
+        </p:nvCxnSpPr>
+        <p:spPr>
+          <a:xfrm>
+            <a:off x="10620721" y="5462873"/>
+            <a:ext cx="521228" cy="592282"/>
+          </a:xfrm>
+          <a:prstGeom prst="line">
+            <a:avLst/>
+          </a:prstGeom>
+        </p:spPr>
+        <p:style>
+          <a:lnRef idx="2">
+            <a:schemeClr val="dk1"/>
+          </a:lnRef>
+          <a:fillRef idx="0">
+            <a:schemeClr val="dk1"/>
+          </a:fillRef>
+          <a:effectRef idx="1">
+            <a:schemeClr val="dk1"/>
+          </a:effectRef>
+          <a:fontRef idx="minor">
+            <a:schemeClr val="tx1"/>
+          </a:fontRef>
+        </p:style>
+      </p:cxnSp>
+      <p:sp>
+        <p:nvSpPr>
+          <p:cNvPr id="5" name="TextBox 4">
+            <a:extLst>
+              <a:ext uri="{FF2B5EF4-FFF2-40B4-BE49-F238E27FC236}">
+                <a16:creationId xmlns:a16="http://schemas.microsoft.com/office/drawing/2014/main" id="{9F64C362-AC39-726E-4AB4-E0FCA54F936C}"/>
+              </a:ext>
+            </a:extLst>
+          </p:cNvPr>
+          <p:cNvSpPr txBox="1"/>
+          <p:nvPr/>
+        </p:nvSpPr>
+        <p:spPr>
+          <a:xfrm>
+            <a:off x="8803257" y="2531629"/>
+            <a:ext cx="391454" cy="386709"/>
+          </a:xfrm>
+          <a:prstGeom prst="rect">
+            <a:avLst/>
+          </a:prstGeom>
+          <a:noFill/>
+        </p:spPr>
+        <p:txBody>
+          <a:bodyPr wrap="none" rtlCol="0">
+            <a:spAutoFit/>
+          </a:bodyPr>
+          <a:lstStyle/>
+          <a:p>
+            <a:r>
+              <a:rPr lang="en-US" sz="1913" b="1" dirty="0"/>
+              <a:t>c)</a:t>
+            </a:r>
+          </a:p>
+        </p:txBody>
+      </p:sp>
+      <p:cxnSp>
+        <p:nvCxnSpPr>
+          <p:cNvPr id="6" name="Straight Arrow Connector 5">
+            <a:extLst>
+              <a:ext uri="{FF2B5EF4-FFF2-40B4-BE49-F238E27FC236}">
+                <a16:creationId xmlns:a16="http://schemas.microsoft.com/office/drawing/2014/main" id="{52B5F586-6B07-01A5-5CB9-3174647A33F0}"/>
+              </a:ext>
+            </a:extLst>
+          </p:cNvPr>
+          <p:cNvCxnSpPr>
+            <a:cxnSpLocks/>
+          </p:cNvCxnSpPr>
+          <p:nvPr/>
+        </p:nvCxnSpPr>
+        <p:spPr>
+          <a:xfrm flipV="1">
+            <a:off x="9175501" y="5246179"/>
+            <a:ext cx="491693" cy="257175"/>
+          </a:xfrm>
+          <a:prstGeom prst="straightConnector1">
+            <a:avLst/>
+          </a:prstGeom>
+          <a:ln w="38100">
+            <a:solidFill>
+              <a:srgbClr val="FF0000"/>
+            </a:solidFill>
+            <a:tailEnd type="triangle"/>
+          </a:ln>
+        </p:spPr>
+        <p:style>
+          <a:lnRef idx="2">
+            <a:schemeClr val="accent1"/>
+          </a:lnRef>
+          <a:fillRef idx="0">
+            <a:schemeClr val="accent1"/>
+          </a:fillRef>
+          <a:effectRef idx="1">
+            <a:schemeClr val="accent1"/>
+          </a:effectRef>
+          <a:fontRef idx="minor">
+            <a:schemeClr val="tx1"/>
+          </a:fontRef>
+        </p:style>
+      </p:cxnSp>
+      <p:sp>
+        <p:nvSpPr>
+          <p:cNvPr id="48" name="Arrow: Right 47">
+            <a:extLst>
+              <a:ext uri="{FF2B5EF4-FFF2-40B4-BE49-F238E27FC236}">
+                <a16:creationId xmlns:a16="http://schemas.microsoft.com/office/drawing/2014/main" id="{ED140BDC-A6F4-4619-A784-A2275042DE80}"/>
+              </a:ext>
+            </a:extLst>
+          </p:cNvPr>
+          <p:cNvSpPr/>
+          <p:nvPr/>
+        </p:nvSpPr>
+        <p:spPr>
+          <a:xfrm>
+            <a:off x="7146925" y="5334926"/>
+            <a:ext cx="1381439" cy="288925"/>
+          </a:xfrm>
+          <a:prstGeom prst="rightArrow">
+            <a:avLst/>
+          </a:prstGeom>
+          <a:solidFill>
+            <a:srgbClr val="B5D197"/>
+          </a:solidFill>
+        </p:spPr>
+        <p:style>
+          <a:lnRef idx="2">
+            <a:schemeClr val="accent6">
+              <a:shade val="15000"/>
+            </a:schemeClr>
+          </a:lnRef>
+          <a:fillRef idx="1">
+            <a:schemeClr val="accent6"/>
+          </a:fillRef>
+          <a:effectRef idx="0">
+            <a:schemeClr val="accent6"/>
+          </a:effectRef>
+          <a:fontRef idx="minor">
+            <a:schemeClr val="lt1"/>
+          </a:fontRef>
+        </p:style>
+        <p:txBody>
+          <a:bodyPr rtlCol="0" anchor="ctr"/>
+          <a:lstStyle/>
+          <a:p>
+            <a:pPr algn="ctr"/>
+            <a:endParaRPr lang="en-GB" sz="1350"/>
+          </a:p>
+        </p:txBody>
+      </p:sp>
+      <p:sp>
+        <p:nvSpPr>
+          <p:cNvPr id="51" name="Rectangle 50">
+            <a:extLst>
+              <a:ext uri="{FF2B5EF4-FFF2-40B4-BE49-F238E27FC236}">
+                <a16:creationId xmlns:a16="http://schemas.microsoft.com/office/drawing/2014/main" id="{1E512D5F-27F9-EBD4-9B3D-C62B0202A984}"/>
+              </a:ext>
+            </a:extLst>
+          </p:cNvPr>
+          <p:cNvSpPr/>
+          <p:nvPr/>
+        </p:nvSpPr>
+        <p:spPr>
+          <a:xfrm rot="16200000">
+            <a:off x="6856554" y="4976851"/>
+            <a:ext cx="721820" cy="140116"/>
+          </a:xfrm>
+          <a:prstGeom prst="rect">
+            <a:avLst/>
+          </a:prstGeom>
+          <a:solidFill>
+            <a:srgbClr val="B5D197"/>
+          </a:solidFill>
+        </p:spPr>
+        <p:style>
+          <a:lnRef idx="2">
+            <a:schemeClr val="accent6">
+              <a:shade val="15000"/>
+            </a:schemeClr>
+          </a:lnRef>
+          <a:fillRef idx="1">
+            <a:schemeClr val="accent6"/>
+          </a:fillRef>
+          <a:effectRef idx="0">
+            <a:schemeClr val="accent6"/>
+          </a:effectRef>
+          <a:fontRef idx="minor">
+            <a:schemeClr val="lt1"/>
+          </a:fontRef>
+        </p:style>
+        <p:txBody>
+          <a:bodyPr rtlCol="0" anchor="ctr"/>
+          <a:lstStyle/>
+          <a:p>
+            <a:pPr algn="ctr"/>
+            <a:endParaRPr lang="en-GB" sz="1350"/>
+          </a:p>
+        </p:txBody>
+      </p:sp>
+      <p:sp>
+        <p:nvSpPr>
+          <p:cNvPr id="56" name="Rectangle 55">
+            <a:extLst>
+              <a:ext uri="{FF2B5EF4-FFF2-40B4-BE49-F238E27FC236}">
+                <a16:creationId xmlns:a16="http://schemas.microsoft.com/office/drawing/2014/main" id="{6F03B592-6E93-3998-B408-E9E206766AB1}"/>
+              </a:ext>
+            </a:extLst>
+          </p:cNvPr>
+          <p:cNvSpPr/>
+          <p:nvPr/>
+        </p:nvSpPr>
+        <p:spPr>
+          <a:xfrm>
+            <a:off x="7156448" y="5237957"/>
+            <a:ext cx="123444" cy="226504"/>
+          </a:xfrm>
+          <a:prstGeom prst="rect">
+            <a:avLst/>
+          </a:prstGeom>
+          <a:solidFill>
+            <a:srgbClr val="B5D197"/>
+          </a:solidFill>
+          <a:ln>
+            <a:noFill/>
+          </a:ln>
+        </p:spPr>
+        <p:style>
+          <a:lnRef idx="2">
+            <a:schemeClr val="accent1">
+              <a:shade val="15000"/>
+            </a:schemeClr>
+          </a:lnRef>
+          <a:fillRef idx="1">
+            <a:schemeClr val="accent1"/>
+          </a:fillRef>
+          <a:effectRef idx="0">
+            <a:schemeClr val="accent1"/>
+          </a:effectRef>
+          <a:fontRef idx="minor">
+            <a:schemeClr val="lt1"/>
+          </a:fontRef>
+        </p:style>
+        <p:txBody>
+          <a:bodyPr rtlCol="0" anchor="ctr"/>
+          <a:lstStyle/>
+          <a:p>
+            <a:pPr algn="ctr"/>
+            <a:endParaRPr lang="en-GB" sz="1350"/>
+          </a:p>
+        </p:txBody>
+      </p:sp>
+      <p:sp>
+        <p:nvSpPr>
+          <p:cNvPr id="7" name="TextBox 6">
+            <a:extLst>
+              <a:ext uri="{FF2B5EF4-FFF2-40B4-BE49-F238E27FC236}">
+                <a16:creationId xmlns:a16="http://schemas.microsoft.com/office/drawing/2014/main" id="{C264F212-014E-4737-9814-C18982FB7763}"/>
+              </a:ext>
+            </a:extLst>
+          </p:cNvPr>
+          <p:cNvSpPr txBox="1"/>
+          <p:nvPr/>
+        </p:nvSpPr>
+        <p:spPr>
+          <a:xfrm>
+            <a:off x="6847929" y="5579159"/>
+            <a:ext cx="1872437" cy="646331"/>
+          </a:xfrm>
+          <a:prstGeom prst="rect">
+            <a:avLst/>
+          </a:prstGeom>
+          <a:noFill/>
+        </p:spPr>
+        <p:txBody>
+          <a:bodyPr wrap="none" rtlCol="0">
+            <a:spAutoFit/>
+          </a:bodyPr>
+          <a:lstStyle/>
+          <a:p>
+            <a:pPr algn="ctr"/>
+            <a:r>
+              <a:rPr lang="en-US" b="1" dirty="0"/>
+              <a:t>Implementation</a:t>
+            </a:r>
+          </a:p>
+          <a:p>
+            <a:pPr algn="ctr"/>
+            <a:r>
+              <a:rPr lang="en-US" b="1" dirty="0"/>
+              <a:t>SCAMP-5</a:t>
+            </a:r>
+            <a:endParaRPr lang="en-GB" b="1" dirty="0"/>
+          </a:p>
+        </p:txBody>
+      </p:sp>
+      <p:sp>
+        <p:nvSpPr>
+          <p:cNvPr id="11" name="TextBox 10">
+            <a:extLst>
+              <a:ext uri="{FF2B5EF4-FFF2-40B4-BE49-F238E27FC236}">
+                <a16:creationId xmlns:a16="http://schemas.microsoft.com/office/drawing/2014/main" id="{6C775BD9-D835-9301-CA0C-AC8EFB69BCAF}"/>
+              </a:ext>
+            </a:extLst>
+          </p:cNvPr>
+          <p:cNvSpPr txBox="1"/>
+          <p:nvPr/>
+        </p:nvSpPr>
+        <p:spPr>
+          <a:xfrm>
+            <a:off x="8793639" y="4507260"/>
+            <a:ext cx="401072" cy="386709"/>
+          </a:xfrm>
+          <a:prstGeom prst="rect">
+            <a:avLst/>
+          </a:prstGeom>
+          <a:noFill/>
+        </p:spPr>
+        <p:txBody>
+          <a:bodyPr wrap="none" rtlCol="0">
+            <a:spAutoFit/>
+          </a:bodyPr>
+          <a:lstStyle/>
+          <a:p>
+            <a:r>
+              <a:rPr lang="en-US" sz="1913" b="1" dirty="0"/>
+              <a:t>d)</a:t>
+            </a:r>
+          </a:p>
+        </p:txBody>
+      </p:sp>
+    </p:spTree>
+    <p:extLst>
+      <p:ext uri="{BB962C8B-B14F-4D97-AF65-F5344CB8AC3E}">
+        <p14:creationId xmlns:p14="http://schemas.microsoft.com/office/powerpoint/2010/main" val="1606120116"/>
+      </p:ext>
+    </p:extLst>
+  </p:cSld>
+  <p:clrMapOvr>
+    <a:masterClrMapping/>
+  </p:clrMapOvr>
+</p:sld>
+</file>
+
+<file path=ppt/slides/slide4.xml><?xml version="1.0" encoding="utf-8"?>
+<p:sld xmlns:a="http://schemas.openxmlformats.org/drawingml/2006/main" xmlns:r="http://schemas.openxmlformats.org/officeDocument/2006/relationships" xmlns:p="http://schemas.openxmlformats.org/presentationml/2006/main">
+  <p:cSld>
+    <p:spTree>
+      <p:nvGrpSpPr>
+        <p:cNvPr id="1" name="">
+          <a:extLst>
+            <a:ext uri="{FF2B5EF4-FFF2-40B4-BE49-F238E27FC236}">
               <a16:creationId xmlns:a16="http://schemas.microsoft.com/office/drawing/2014/main" id="{AB28F1CB-18AE-9CEF-620D-3BE25C7287AD}"/>
             </a:ext>
           </a:extLst>
@@ -11243,8 +14049,8 @@
           </a:p>
         </p:txBody>
       </p:sp>
-      <mc:AlternateContent xmlns:mc="http://schemas.openxmlformats.org/markup-compatibility/2006">
-        <mc:Choice xmlns:a14="http://schemas.microsoft.com/office/drawing/2010/main" Requires="a14">
+      <mc:AlternateContent xmlns:mc="http://schemas.openxmlformats.org/markup-compatibility/2006" xmlns:a14="http://schemas.microsoft.com/office/drawing/2010/main">
+        <mc:Choice Requires="a14">
           <p:sp>
             <p:nvSpPr>
               <p:cNvPr id="3" name="Rectangle: Rounded Corners 2">
@@ -11330,7 +14136,7 @@
             </p:txBody>
           </p:sp>
         </mc:Choice>
-        <mc:Fallback>
+        <mc:Fallback xmlns="">
           <p:sp>
             <p:nvSpPr>
               <p:cNvPr id="3" name="Rectangle: Rounded Corners 2">
@@ -11375,8 +14181,8 @@
           </p:sp>
         </mc:Fallback>
       </mc:AlternateContent>
-      <mc:AlternateContent xmlns:mc="http://schemas.openxmlformats.org/markup-compatibility/2006">
-        <mc:Choice xmlns:a14="http://schemas.microsoft.com/office/drawing/2010/main" Requires="a14">
+      <mc:AlternateContent xmlns:mc="http://schemas.openxmlformats.org/markup-compatibility/2006" xmlns:a14="http://schemas.microsoft.com/office/drawing/2010/main">
+        <mc:Choice Requires="a14">
           <p:sp>
             <p:nvSpPr>
               <p:cNvPr id="4" name="Rectangle: Rounded Corners 3">
@@ -11470,7 +14276,7 @@
             </p:txBody>
           </p:sp>
         </mc:Choice>
-        <mc:Fallback>
+        <mc:Fallback xmlns="">
           <p:sp>
             <p:nvSpPr>
               <p:cNvPr id="4" name="Rectangle: Rounded Corners 3">
@@ -11515,8 +14321,8 @@
           </p:sp>
         </mc:Fallback>
       </mc:AlternateContent>
-      <mc:AlternateContent xmlns:mc="http://schemas.openxmlformats.org/markup-compatibility/2006">
-        <mc:Choice xmlns:a14="http://schemas.microsoft.com/office/drawing/2010/main" Requires="a14">
+      <mc:AlternateContent xmlns:mc="http://schemas.openxmlformats.org/markup-compatibility/2006" xmlns:a14="http://schemas.microsoft.com/office/drawing/2010/main">
+        <mc:Choice Requires="a14">
           <p:sp>
             <p:nvSpPr>
               <p:cNvPr id="5" name="Rectangle: Rounded Corners 4">
@@ -11601,7 +14407,7 @@
             </p:txBody>
           </p:sp>
         </mc:Choice>
-        <mc:Fallback>
+        <mc:Fallback xmlns="">
           <p:sp>
             <p:nvSpPr>
               <p:cNvPr id="5" name="Rectangle: Rounded Corners 4">
@@ -11646,8 +14452,8 @@
           </p:sp>
         </mc:Fallback>
       </mc:AlternateContent>
-      <mc:AlternateContent xmlns:mc="http://schemas.openxmlformats.org/markup-compatibility/2006">
-        <mc:Choice xmlns:a14="http://schemas.microsoft.com/office/drawing/2010/main" Requires="a14">
+      <mc:AlternateContent xmlns:mc="http://schemas.openxmlformats.org/markup-compatibility/2006" xmlns:a14="http://schemas.microsoft.com/office/drawing/2010/main">
+        <mc:Choice Requires="a14">
           <p:sp>
             <p:nvSpPr>
               <p:cNvPr id="6" name="Rectangle: Rounded Corners 5">
@@ -11732,7 +14538,7 @@
             </p:txBody>
           </p:sp>
         </mc:Choice>
-        <mc:Fallback>
+        <mc:Fallback xmlns="">
           <p:sp>
             <p:nvSpPr>
               <p:cNvPr id="6" name="Rectangle: Rounded Corners 5">
@@ -11777,8 +14583,8 @@
           </p:sp>
         </mc:Fallback>
       </mc:AlternateContent>
-      <mc:AlternateContent xmlns:mc="http://schemas.openxmlformats.org/markup-compatibility/2006">
-        <mc:Choice xmlns:a14="http://schemas.microsoft.com/office/drawing/2010/main" Requires="a14">
+      <mc:AlternateContent xmlns:mc="http://schemas.openxmlformats.org/markup-compatibility/2006" xmlns:a14="http://schemas.microsoft.com/office/drawing/2010/main">
+        <mc:Choice Requires="a14">
           <p:sp>
             <p:nvSpPr>
               <p:cNvPr id="7" name="Rectangle: Rounded Corners 6">
@@ -11872,7 +14678,7 @@
             </p:txBody>
           </p:sp>
         </mc:Choice>
-        <mc:Fallback>
+        <mc:Fallback xmlns="">
           <p:sp>
             <p:nvSpPr>
               <p:cNvPr id="7" name="Rectangle: Rounded Corners 6">
@@ -11917,8 +14723,8 @@
           </p:sp>
         </mc:Fallback>
       </mc:AlternateContent>
-      <mc:AlternateContent xmlns:mc="http://schemas.openxmlformats.org/markup-compatibility/2006">
-        <mc:Choice xmlns:a14="http://schemas.microsoft.com/office/drawing/2010/main" Requires="a14">
+      <mc:AlternateContent xmlns:mc="http://schemas.openxmlformats.org/markup-compatibility/2006" xmlns:a14="http://schemas.microsoft.com/office/drawing/2010/main">
+        <mc:Choice Requires="a14">
           <p:sp>
             <p:nvSpPr>
               <p:cNvPr id="8" name="Rectangle: Rounded Corners 7">
@@ -12079,7 +14885,7 @@
             </p:txBody>
           </p:sp>
         </mc:Choice>
-        <mc:Fallback>
+        <mc:Fallback xmlns="">
           <p:sp>
             <p:nvSpPr>
               <p:cNvPr id="8" name="Rectangle: Rounded Corners 7">
@@ -12307,8 +15113,8 @@
           </a:fontRef>
         </p:style>
       </p:cxnSp>
-      <mc:AlternateContent xmlns:mc="http://schemas.openxmlformats.org/markup-compatibility/2006">
-        <mc:Choice xmlns:a14="http://schemas.microsoft.com/office/drawing/2010/main" Requires="a14">
+      <mc:AlternateContent xmlns:mc="http://schemas.openxmlformats.org/markup-compatibility/2006" xmlns:a14="http://schemas.microsoft.com/office/drawing/2010/main">
+        <mc:Choice Requires="a14">
           <p:sp>
             <p:nvSpPr>
               <p:cNvPr id="26" name="Rectangle: Rounded Corners 25">
@@ -12388,7 +15194,7 @@
             </p:txBody>
           </p:sp>
         </mc:Choice>
-        <mc:Fallback>
+        <mc:Fallback xmlns="">
           <p:sp>
             <p:nvSpPr>
               <p:cNvPr id="26" name="Rectangle: Rounded Corners 25">
@@ -12433,8 +15239,8 @@
           </p:sp>
         </mc:Fallback>
       </mc:AlternateContent>
-      <mc:AlternateContent xmlns:mc="http://schemas.openxmlformats.org/markup-compatibility/2006">
-        <mc:Choice xmlns:a14="http://schemas.microsoft.com/office/drawing/2010/main" Requires="a14">
+      <mc:AlternateContent xmlns:mc="http://schemas.openxmlformats.org/markup-compatibility/2006" xmlns:a14="http://schemas.microsoft.com/office/drawing/2010/main">
+        <mc:Choice Requires="a14">
           <p:sp>
             <p:nvSpPr>
               <p:cNvPr id="27" name="Rectangle: Rounded Corners 26">
@@ -12501,7 +15307,7 @@
             </p:txBody>
           </p:sp>
         </mc:Choice>
-        <mc:Fallback>
+        <mc:Fallback xmlns="">
           <p:sp>
             <p:nvSpPr>
               <p:cNvPr id="27" name="Rectangle: Rounded Corners 26">
@@ -12546,8 +15352,8 @@
           </p:sp>
         </mc:Fallback>
       </mc:AlternateContent>
-      <mc:AlternateContent xmlns:mc="http://schemas.openxmlformats.org/markup-compatibility/2006">
-        <mc:Choice xmlns:a14="http://schemas.microsoft.com/office/drawing/2010/main" Requires="a14">
+      <mc:AlternateContent xmlns:mc="http://schemas.openxmlformats.org/markup-compatibility/2006" xmlns:a14="http://schemas.microsoft.com/office/drawing/2010/main">
+        <mc:Choice Requires="a14">
           <p:sp>
             <p:nvSpPr>
               <p:cNvPr id="28" name="Rectangle: Rounded Corners 27">
@@ -12641,7 +15447,7 @@
             </p:txBody>
           </p:sp>
         </mc:Choice>
-        <mc:Fallback>
+        <mc:Fallback xmlns="">
           <p:sp>
             <p:nvSpPr>
               <p:cNvPr id="28" name="Rectangle: Rounded Corners 27">
@@ -12686,8 +15492,8 @@
           </p:sp>
         </mc:Fallback>
       </mc:AlternateContent>
-      <mc:AlternateContent xmlns:mc="http://schemas.openxmlformats.org/markup-compatibility/2006">
-        <mc:Choice xmlns:a14="http://schemas.microsoft.com/office/drawing/2010/main" Requires="a14">
+      <mc:AlternateContent xmlns:mc="http://schemas.openxmlformats.org/markup-compatibility/2006" xmlns:a14="http://schemas.microsoft.com/office/drawing/2010/main">
+        <mc:Choice Requires="a14">
           <p:sp>
             <p:nvSpPr>
               <p:cNvPr id="29" name="Rectangle: Rounded Corners 28">
@@ -12773,7 +15579,7 @@
             </p:txBody>
           </p:sp>
         </mc:Choice>
-        <mc:Fallback>
+        <mc:Fallback xmlns="">
           <p:sp>
             <p:nvSpPr>
               <p:cNvPr id="29" name="Rectangle: Rounded Corners 28">
@@ -12818,8 +15624,8 @@
           </p:sp>
         </mc:Fallback>
       </mc:AlternateContent>
-      <mc:AlternateContent xmlns:mc="http://schemas.openxmlformats.org/markup-compatibility/2006">
-        <mc:Choice xmlns:a14="http://schemas.microsoft.com/office/drawing/2010/main" Requires="a14">
+      <mc:AlternateContent xmlns:mc="http://schemas.openxmlformats.org/markup-compatibility/2006" xmlns:a14="http://schemas.microsoft.com/office/drawing/2010/main">
+        <mc:Choice Requires="a14">
           <p:sp>
             <p:nvSpPr>
               <p:cNvPr id="30" name="Rectangle: Rounded Corners 29">
@@ -13012,7 +15818,7 @@
             </p:txBody>
           </p:sp>
         </mc:Choice>
-        <mc:Fallback>
+        <mc:Fallback xmlns="">
           <p:sp>
             <p:nvSpPr>
               <p:cNvPr id="30" name="Rectangle: Rounded Corners 29">
@@ -13379,8 +16185,8 @@
           </a:fontRef>
         </p:style>
       </p:cxnSp>
-      <mc:AlternateContent xmlns:mc="http://schemas.openxmlformats.org/markup-compatibility/2006">
-        <mc:Choice xmlns:a14="http://schemas.microsoft.com/office/drawing/2010/main" Requires="a14">
+      <mc:AlternateContent xmlns:mc="http://schemas.openxmlformats.org/markup-compatibility/2006" xmlns:a14="http://schemas.microsoft.com/office/drawing/2010/main">
+        <mc:Choice Requires="a14">
           <p:sp>
             <p:nvSpPr>
               <p:cNvPr id="80" name="Rectangle: Rounded Corners 79">
@@ -13465,7 +16271,7 @@
             </p:txBody>
           </p:sp>
         </mc:Choice>
-        <mc:Fallback>
+        <mc:Fallback xmlns="">
           <p:sp>
             <p:nvSpPr>
               <p:cNvPr id="80" name="Rectangle: Rounded Corners 79">
@@ -13510,8 +16316,8 @@
           </p:sp>
         </mc:Fallback>
       </mc:AlternateContent>
-      <mc:AlternateContent xmlns:mc="http://schemas.openxmlformats.org/markup-compatibility/2006">
-        <mc:Choice xmlns:a14="http://schemas.microsoft.com/office/drawing/2010/main" Requires="a14">
+      <mc:AlternateContent xmlns:mc="http://schemas.openxmlformats.org/markup-compatibility/2006" xmlns:a14="http://schemas.microsoft.com/office/drawing/2010/main">
+        <mc:Choice Requires="a14">
           <p:sp>
             <p:nvSpPr>
               <p:cNvPr id="81" name="Rectangle: Rounded Corners 80">
@@ -13581,7 +16387,7 @@
             </p:txBody>
           </p:sp>
         </mc:Choice>
-        <mc:Fallback>
+        <mc:Fallback xmlns="">
           <p:sp>
             <p:nvSpPr>
               <p:cNvPr id="81" name="Rectangle: Rounded Corners 80">
@@ -13822,8 +16628,8 @@
           </a:p>
         </p:txBody>
       </p:sp>
-      <mc:AlternateContent xmlns:mc="http://schemas.openxmlformats.org/markup-compatibility/2006">
-        <mc:Choice xmlns:a14="http://schemas.microsoft.com/office/drawing/2010/main" Requires="a14">
+      <mc:AlternateContent xmlns:mc="http://schemas.openxmlformats.org/markup-compatibility/2006" xmlns:a14="http://schemas.microsoft.com/office/drawing/2010/main">
+        <mc:Choice Requires="a14">
           <p:sp>
             <p:nvSpPr>
               <p:cNvPr id="91" name="TextBox 90">
@@ -13892,7 +16698,7 @@
             </p:txBody>
           </p:sp>
         </mc:Choice>
-        <mc:Fallback>
+        <mc:Fallback xmlns="">
           <p:sp>
             <p:nvSpPr>
               <p:cNvPr id="91" name="TextBox 90">
@@ -13937,8 +16743,8 @@
           </p:sp>
         </mc:Fallback>
       </mc:AlternateContent>
-      <mc:AlternateContent xmlns:mc="http://schemas.openxmlformats.org/markup-compatibility/2006">
-        <mc:Choice xmlns:a14="http://schemas.microsoft.com/office/drawing/2010/main" Requires="a14">
+      <mc:AlternateContent xmlns:mc="http://schemas.openxmlformats.org/markup-compatibility/2006" xmlns:a14="http://schemas.microsoft.com/office/drawing/2010/main">
+        <mc:Choice Requires="a14">
           <p:sp>
             <p:nvSpPr>
               <p:cNvPr id="92" name="TextBox 91">
@@ -14007,7 +16813,7 @@
             </p:txBody>
           </p:sp>
         </mc:Choice>
-        <mc:Fallback>
+        <mc:Fallback xmlns="">
           <p:sp>
             <p:nvSpPr>
               <p:cNvPr id="92" name="TextBox 91">
@@ -14537,8 +17343,8 @@
           </a:fontRef>
         </p:style>
       </p:cxnSp>
-      <mc:AlternateContent xmlns:mc="http://schemas.openxmlformats.org/markup-compatibility/2006">
-        <mc:Choice xmlns:a14="http://schemas.microsoft.com/office/drawing/2010/main" Requires="a14">
+      <mc:AlternateContent xmlns:mc="http://schemas.openxmlformats.org/markup-compatibility/2006" xmlns:a14="http://schemas.microsoft.com/office/drawing/2010/main">
+        <mc:Choice Requires="a14">
           <p:sp>
             <p:nvSpPr>
               <p:cNvPr id="113" name="TextBox 112">
@@ -14607,7 +17413,7 @@
             </p:txBody>
           </p:sp>
         </mc:Choice>
-        <mc:Fallback>
+        <mc:Fallback xmlns="">
           <p:sp>
             <p:nvSpPr>
               <p:cNvPr id="113" name="TextBox 112">
@@ -14652,8 +17458,8 @@
           </p:sp>
         </mc:Fallback>
       </mc:AlternateContent>
-      <mc:AlternateContent xmlns:mc="http://schemas.openxmlformats.org/markup-compatibility/2006">
-        <mc:Choice xmlns:a14="http://schemas.microsoft.com/office/drawing/2010/main" Requires="a14">
+      <mc:AlternateContent xmlns:mc="http://schemas.openxmlformats.org/markup-compatibility/2006" xmlns:a14="http://schemas.microsoft.com/office/drawing/2010/main">
+        <mc:Choice Requires="a14">
           <p:sp>
             <p:nvSpPr>
               <p:cNvPr id="114" name="TextBox 113">
@@ -14722,7 +17528,7 @@
             </p:txBody>
           </p:sp>
         </mc:Choice>
-        <mc:Fallback>
+        <mc:Fallback xmlns="">
           <p:sp>
             <p:nvSpPr>
               <p:cNvPr id="114" name="TextBox 113">
@@ -14767,8 +17573,8 @@
           </p:sp>
         </mc:Fallback>
       </mc:AlternateContent>
-      <mc:AlternateContent xmlns:mc="http://schemas.openxmlformats.org/markup-compatibility/2006">
-        <mc:Choice xmlns:a14="http://schemas.microsoft.com/office/drawing/2010/main" Requires="a14">
+      <mc:AlternateContent xmlns:mc="http://schemas.openxmlformats.org/markup-compatibility/2006" xmlns:a14="http://schemas.microsoft.com/office/drawing/2010/main">
+        <mc:Choice Requires="a14">
           <p:sp>
             <p:nvSpPr>
               <p:cNvPr id="117" name="TextBox 116">
@@ -14837,7 +17643,7 @@
             </p:txBody>
           </p:sp>
         </mc:Choice>
-        <mc:Fallback>
+        <mc:Fallback xmlns="">
           <p:sp>
             <p:nvSpPr>
               <p:cNvPr id="117" name="TextBox 116">
